--- a/docs/pptx/whole/ritu-linsubhr-disc-anyhosp.pptx
+++ b/docs/pptx/whole/ritu-linsubhr-disc-anyhosp.pptx
@@ -2443,7 +2443,7 @@
           </p:nvSpPr>
           <p:spPr>
             <a:xfrm>
-              <a:off x="1942521" y="2073503"/>
+              <a:off x="1943067" y="2073503"/>
               <a:ext cx="0" cy="3649639"/>
             </a:xfrm>
             <a:custGeom>
@@ -2486,7 +2486,7 @@
           </p:nvSpPr>
           <p:spPr>
             <a:xfrm>
-              <a:off x="4460699" y="2073503"/>
+              <a:off x="4460487" y="2073503"/>
               <a:ext cx="0" cy="3649639"/>
             </a:xfrm>
             <a:custGeom>
@@ -2529,7 +2529,7 @@
           </p:nvSpPr>
           <p:spPr>
             <a:xfrm>
-              <a:off x="6978877" y="2073503"/>
+              <a:off x="6977907" y="2073503"/>
               <a:ext cx="0" cy="3649639"/>
             </a:xfrm>
             <a:custGeom>
@@ -2787,7 +2787,7 @@
           </p:nvSpPr>
           <p:spPr>
             <a:xfrm>
-              <a:off x="3201610" y="2073503"/>
+              <a:off x="3201777" y="2073503"/>
               <a:ext cx="0" cy="3649639"/>
             </a:xfrm>
             <a:custGeom>
@@ -2830,7 +2830,7 @@
           </p:nvSpPr>
           <p:spPr>
             <a:xfrm>
-              <a:off x="5719788" y="2073503"/>
+              <a:off x="5719197" y="2073503"/>
               <a:ext cx="0" cy="3649639"/>
             </a:xfrm>
             <a:custGeom>
@@ -2873,7 +2873,7 @@
           </p:nvSpPr>
           <p:spPr>
             <a:xfrm>
-              <a:off x="8237966" y="2073503"/>
+              <a:off x="8236616" y="2073503"/>
               <a:ext cx="0" cy="3649639"/>
             </a:xfrm>
             <a:custGeom>
@@ -2917,572 +2917,572 @@
           <p:spPr>
             <a:xfrm>
               <a:off x="1172049" y="2073503"/>
-              <a:ext cx="7090630" cy="3169611"/>
+              <a:ext cx="7090630" cy="3168426"/>
             </a:xfrm>
             <a:custGeom>
               <a:avLst/>
               <a:pathLst>
-                <a:path w="7090630" h="3169611">
+                <a:path w="7090630" h="3168426">
                   <a:moveTo>
-                    <a:pt x="948089" y="0"/>
+                    <a:pt x="957075" y="0"/>
                   </a:moveTo>
                   <a:lnTo>
-                    <a:pt x="1002715" y="73989"/>
-                  </a:lnTo>
-                  <a:lnTo>
-                    <a:pt x="1074337" y="168316"/>
-                  </a:lnTo>
-                  <a:lnTo>
-                    <a:pt x="1145960" y="260034"/>
-                  </a:lnTo>
-                  <a:lnTo>
-                    <a:pt x="1217582" y="349214"/>
-                  </a:lnTo>
-                  <a:lnTo>
-                    <a:pt x="1289205" y="435928"/>
-                  </a:lnTo>
-                  <a:lnTo>
-                    <a:pt x="1360827" y="520243"/>
-                  </a:lnTo>
-                  <a:lnTo>
-                    <a:pt x="1432450" y="602225"/>
-                  </a:lnTo>
-                  <a:lnTo>
-                    <a:pt x="1504073" y="681939"/>
-                  </a:lnTo>
-                  <a:lnTo>
-                    <a:pt x="1575695" y="759448"/>
-                  </a:lnTo>
-                  <a:lnTo>
-                    <a:pt x="1647318" y="834813"/>
-                  </a:lnTo>
-                  <a:lnTo>
-                    <a:pt x="1718940" y="908093"/>
-                  </a:lnTo>
-                  <a:lnTo>
-                    <a:pt x="1790563" y="979346"/>
-                  </a:lnTo>
-                  <a:lnTo>
-                    <a:pt x="1862185" y="1048627"/>
-                  </a:lnTo>
-                  <a:lnTo>
-                    <a:pt x="1933808" y="1115992"/>
-                  </a:lnTo>
-                  <a:lnTo>
-                    <a:pt x="2005430" y="1181494"/>
-                  </a:lnTo>
-                  <a:lnTo>
-                    <a:pt x="2077053" y="1245183"/>
-                  </a:lnTo>
-                  <a:lnTo>
-                    <a:pt x="2148675" y="1307111"/>
-                  </a:lnTo>
-                  <a:lnTo>
-                    <a:pt x="2220298" y="1367325"/>
-                  </a:lnTo>
-                  <a:lnTo>
-                    <a:pt x="2291920" y="1425873"/>
-                  </a:lnTo>
-                  <a:lnTo>
-                    <a:pt x="2363543" y="1482802"/>
-                  </a:lnTo>
-                  <a:lnTo>
-                    <a:pt x="2435165" y="1538156"/>
-                  </a:lnTo>
-                  <a:lnTo>
-                    <a:pt x="2506788" y="1591979"/>
-                  </a:lnTo>
-                  <a:lnTo>
-                    <a:pt x="2578410" y="1644313"/>
-                  </a:lnTo>
-                  <a:lnTo>
-                    <a:pt x="2650033" y="1695199"/>
-                  </a:lnTo>
-                  <a:lnTo>
-                    <a:pt x="2721655" y="1744677"/>
-                  </a:lnTo>
-                  <a:lnTo>
-                    <a:pt x="2793278" y="1792787"/>
-                  </a:lnTo>
-                  <a:lnTo>
-                    <a:pt x="2864901" y="1839565"/>
-                  </a:lnTo>
-                  <a:lnTo>
-                    <a:pt x="2936523" y="1885050"/>
-                  </a:lnTo>
-                  <a:lnTo>
-                    <a:pt x="3008146" y="1929276"/>
-                  </a:lnTo>
-                  <a:lnTo>
-                    <a:pt x="3079768" y="1972279"/>
-                  </a:lnTo>
-                  <a:lnTo>
-                    <a:pt x="3151391" y="2014092"/>
-                  </a:lnTo>
-                  <a:lnTo>
-                    <a:pt x="3223013" y="2054748"/>
-                  </a:lnTo>
-                  <a:lnTo>
-                    <a:pt x="3294636" y="2094280"/>
-                  </a:lnTo>
-                  <a:lnTo>
-                    <a:pt x="3366258" y="2132718"/>
-                  </a:lnTo>
-                  <a:lnTo>
-                    <a:pt x="3437881" y="2170093"/>
-                  </a:lnTo>
-                  <a:lnTo>
-                    <a:pt x="3509503" y="2206434"/>
-                  </a:lnTo>
-                  <a:lnTo>
-                    <a:pt x="3581126" y="2241769"/>
-                  </a:lnTo>
-                  <a:lnTo>
-                    <a:pt x="3652748" y="2276127"/>
-                  </a:lnTo>
-                  <a:lnTo>
-                    <a:pt x="3724371" y="2309535"/>
-                  </a:lnTo>
-                  <a:lnTo>
-                    <a:pt x="3795993" y="2342018"/>
-                  </a:lnTo>
-                  <a:lnTo>
-                    <a:pt x="3867616" y="2373603"/>
-                  </a:lnTo>
-                  <a:lnTo>
-                    <a:pt x="3939238" y="2404314"/>
-                  </a:lnTo>
-                  <a:lnTo>
-                    <a:pt x="4010861" y="2434175"/>
-                  </a:lnTo>
-                  <a:lnTo>
-                    <a:pt x="4082483" y="2463210"/>
-                  </a:lnTo>
-                  <a:lnTo>
-                    <a:pt x="4154106" y="2491442"/>
-                  </a:lnTo>
-                  <a:lnTo>
-                    <a:pt x="4225729" y="2518894"/>
-                  </a:lnTo>
-                  <a:lnTo>
-                    <a:pt x="4297351" y="2545585"/>
-                  </a:lnTo>
-                  <a:lnTo>
-                    <a:pt x="4368974" y="2571538"/>
-                  </a:lnTo>
-                  <a:lnTo>
-                    <a:pt x="4440596" y="2596774"/>
-                  </a:lnTo>
-                  <a:lnTo>
-                    <a:pt x="4512219" y="2621311"/>
-                  </a:lnTo>
-                  <a:lnTo>
-                    <a:pt x="4583841" y="2645169"/>
-                  </a:lnTo>
-                  <a:lnTo>
-                    <a:pt x="4655464" y="2654919"/>
-                  </a:lnTo>
-                  <a:lnTo>
-                    <a:pt x="4727086" y="2655959"/>
-                  </a:lnTo>
-                  <a:lnTo>
-                    <a:pt x="4798709" y="2656998"/>
-                  </a:lnTo>
-                  <a:lnTo>
-                    <a:pt x="4870331" y="2658036"/>
-                  </a:lnTo>
-                  <a:lnTo>
-                    <a:pt x="4941954" y="2659072"/>
-                  </a:lnTo>
-                  <a:lnTo>
-                    <a:pt x="5013576" y="2660107"/>
-                  </a:lnTo>
-                  <a:lnTo>
-                    <a:pt x="5085199" y="2661141"/>
-                  </a:lnTo>
-                  <a:lnTo>
-                    <a:pt x="5156821" y="2662173"/>
-                  </a:lnTo>
-                  <a:lnTo>
-                    <a:pt x="5228444" y="2663205"/>
-                  </a:lnTo>
-                  <a:lnTo>
-                    <a:pt x="5300066" y="2664235"/>
-                  </a:lnTo>
-                  <a:lnTo>
-                    <a:pt x="5371689" y="2665263"/>
-                  </a:lnTo>
-                  <a:lnTo>
-                    <a:pt x="5443311" y="2666291"/>
-                  </a:lnTo>
-                  <a:lnTo>
-                    <a:pt x="5514934" y="2667317"/>
-                  </a:lnTo>
-                  <a:lnTo>
-                    <a:pt x="5586557" y="2668341"/>
-                  </a:lnTo>
-                  <a:lnTo>
-                    <a:pt x="5658179" y="2669365"/>
-                  </a:lnTo>
-                  <a:lnTo>
-                    <a:pt x="5729802" y="2670387"/>
-                  </a:lnTo>
-                  <a:lnTo>
-                    <a:pt x="5801424" y="2671408"/>
-                  </a:lnTo>
-                  <a:lnTo>
-                    <a:pt x="5873047" y="2672428"/>
-                  </a:lnTo>
-                  <a:lnTo>
-                    <a:pt x="5944669" y="2673446"/>
-                  </a:lnTo>
-                  <a:lnTo>
-                    <a:pt x="6016292" y="2674463"/>
-                  </a:lnTo>
-                  <a:lnTo>
-                    <a:pt x="6087914" y="2675479"/>
-                  </a:lnTo>
-                  <a:lnTo>
-                    <a:pt x="6159537" y="2676493"/>
-                  </a:lnTo>
-                  <a:lnTo>
-                    <a:pt x="6231159" y="2677506"/>
-                  </a:lnTo>
-                  <a:lnTo>
-                    <a:pt x="6302782" y="2678518"/>
-                  </a:lnTo>
-                  <a:lnTo>
-                    <a:pt x="6374404" y="2679529"/>
-                  </a:lnTo>
-                  <a:lnTo>
-                    <a:pt x="6446027" y="2680539"/>
-                  </a:lnTo>
-                  <a:lnTo>
-                    <a:pt x="6517649" y="2681547"/>
-                  </a:lnTo>
-                  <a:lnTo>
-                    <a:pt x="6589272" y="2682554"/>
-                  </a:lnTo>
-                  <a:lnTo>
-                    <a:pt x="6660894" y="2683559"/>
-                  </a:lnTo>
-                  <a:lnTo>
-                    <a:pt x="6732517" y="2684564"/>
-                  </a:lnTo>
-                  <a:lnTo>
-                    <a:pt x="6804139" y="2685567"/>
-                  </a:lnTo>
-                  <a:lnTo>
-                    <a:pt x="6875762" y="2686569"/>
-                  </a:lnTo>
-                  <a:lnTo>
-                    <a:pt x="6947385" y="2687569"/>
-                  </a:lnTo>
-                  <a:lnTo>
-                    <a:pt x="7019007" y="2688569"/>
-                  </a:lnTo>
-                  <a:lnTo>
-                    <a:pt x="7090630" y="2689567"/>
-                  </a:lnTo>
-                  <a:lnTo>
-                    <a:pt x="7090630" y="3169611"/>
-                  </a:lnTo>
-                  <a:lnTo>
-                    <a:pt x="7019007" y="3160674"/>
-                  </a:lnTo>
-                  <a:lnTo>
-                    <a:pt x="6947385" y="3151482"/>
-                  </a:lnTo>
-                  <a:lnTo>
-                    <a:pt x="6875762" y="3142029"/>
-                  </a:lnTo>
-                  <a:lnTo>
-                    <a:pt x="6804139" y="3132306"/>
-                  </a:lnTo>
-                  <a:lnTo>
-                    <a:pt x="6732517" y="3122308"/>
-                  </a:lnTo>
-                  <a:lnTo>
-                    <a:pt x="6660894" y="3112024"/>
-                  </a:lnTo>
-                  <a:lnTo>
-                    <a:pt x="6589272" y="3101448"/>
-                  </a:lnTo>
-                  <a:lnTo>
-                    <a:pt x="6517649" y="3090572"/>
-                  </a:lnTo>
-                  <a:lnTo>
-                    <a:pt x="6446027" y="3079385"/>
-                  </a:lnTo>
-                  <a:lnTo>
-                    <a:pt x="6374404" y="3067881"/>
-                  </a:lnTo>
-                  <a:lnTo>
-                    <a:pt x="6302782" y="3056049"/>
-                  </a:lnTo>
-                  <a:lnTo>
-                    <a:pt x="6231159" y="3043881"/>
-                  </a:lnTo>
-                  <a:lnTo>
-                    <a:pt x="6159537" y="3031366"/>
-                  </a:lnTo>
-                  <a:lnTo>
-                    <a:pt x="6087914" y="3018495"/>
-                  </a:lnTo>
-                  <a:lnTo>
-                    <a:pt x="6016292" y="3005259"/>
-                  </a:lnTo>
-                  <a:lnTo>
-                    <a:pt x="5944669" y="2991645"/>
-                  </a:lnTo>
-                  <a:lnTo>
-                    <a:pt x="5873047" y="2977644"/>
-                  </a:lnTo>
-                  <a:lnTo>
-                    <a:pt x="5801424" y="2963245"/>
-                  </a:lnTo>
-                  <a:lnTo>
-                    <a:pt x="5729802" y="2948436"/>
-                  </a:lnTo>
-                  <a:lnTo>
-                    <a:pt x="5658179" y="2933206"/>
-                  </a:lnTo>
-                  <a:lnTo>
-                    <a:pt x="5586557" y="2917543"/>
-                  </a:lnTo>
-                  <a:lnTo>
-                    <a:pt x="5514934" y="2901434"/>
-                  </a:lnTo>
-                  <a:lnTo>
-                    <a:pt x="5443311" y="2884867"/>
-                  </a:lnTo>
-                  <a:lnTo>
-                    <a:pt x="5371689" y="2867828"/>
-                  </a:lnTo>
-                  <a:lnTo>
-                    <a:pt x="5300066" y="2850304"/>
-                  </a:lnTo>
-                  <a:lnTo>
-                    <a:pt x="5228444" y="2832282"/>
-                  </a:lnTo>
-                  <a:lnTo>
-                    <a:pt x="5156821" y="2813747"/>
-                  </a:lnTo>
-                  <a:lnTo>
-                    <a:pt x="5085199" y="2794685"/>
-                  </a:lnTo>
-                  <a:lnTo>
-                    <a:pt x="5013576" y="2775081"/>
-                  </a:lnTo>
-                  <a:lnTo>
-                    <a:pt x="4941954" y="2754918"/>
-                  </a:lnTo>
-                  <a:lnTo>
-                    <a:pt x="4870331" y="2734183"/>
-                  </a:lnTo>
-                  <a:lnTo>
-                    <a:pt x="4798709" y="2712857"/>
-                  </a:lnTo>
-                  <a:lnTo>
-                    <a:pt x="4727086" y="2690924"/>
-                  </a:lnTo>
-                  <a:lnTo>
-                    <a:pt x="4655464" y="2668368"/>
-                  </a:lnTo>
-                  <a:lnTo>
-                    <a:pt x="4583841" y="2653877"/>
-                  </a:lnTo>
-                  <a:lnTo>
-                    <a:pt x="4512219" y="2652834"/>
-                  </a:lnTo>
-                  <a:lnTo>
-                    <a:pt x="4440596" y="2651790"/>
-                  </a:lnTo>
-                  <a:lnTo>
-                    <a:pt x="4368974" y="2650744"/>
-                  </a:lnTo>
-                  <a:lnTo>
-                    <a:pt x="4297351" y="2649697"/>
-                  </a:lnTo>
-                  <a:lnTo>
-                    <a:pt x="4225729" y="2648649"/>
-                  </a:lnTo>
-                  <a:lnTo>
-                    <a:pt x="4154106" y="2647600"/>
-                  </a:lnTo>
-                  <a:lnTo>
-                    <a:pt x="4082483" y="2646549"/>
-                  </a:lnTo>
-                  <a:lnTo>
-                    <a:pt x="4010861" y="2645497"/>
-                  </a:lnTo>
-                  <a:lnTo>
-                    <a:pt x="3939238" y="2644443"/>
-                  </a:lnTo>
-                  <a:lnTo>
-                    <a:pt x="3867616" y="2643388"/>
-                  </a:lnTo>
-                  <a:lnTo>
-                    <a:pt x="3795993" y="2642332"/>
-                  </a:lnTo>
-                  <a:lnTo>
-                    <a:pt x="3724371" y="2641275"/>
-                  </a:lnTo>
-                  <a:lnTo>
-                    <a:pt x="3652748" y="2640216"/>
-                  </a:lnTo>
-                  <a:lnTo>
-                    <a:pt x="3581126" y="2639156"/>
-                  </a:lnTo>
-                  <a:lnTo>
-                    <a:pt x="3509503" y="2638095"/>
-                  </a:lnTo>
-                  <a:lnTo>
-                    <a:pt x="3437881" y="2637032"/>
-                  </a:lnTo>
-                  <a:lnTo>
-                    <a:pt x="3366258" y="2635968"/>
-                  </a:lnTo>
-                  <a:lnTo>
-                    <a:pt x="3294636" y="2634902"/>
-                  </a:lnTo>
-                  <a:lnTo>
-                    <a:pt x="3223013" y="2633835"/>
-                  </a:lnTo>
-                  <a:lnTo>
-                    <a:pt x="3151391" y="2632767"/>
-                  </a:lnTo>
-                  <a:lnTo>
-                    <a:pt x="3079768" y="2631698"/>
-                  </a:lnTo>
-                  <a:lnTo>
-                    <a:pt x="3008146" y="2630627"/>
-                  </a:lnTo>
-                  <a:lnTo>
-                    <a:pt x="2936523" y="2629555"/>
-                  </a:lnTo>
-                  <a:lnTo>
-                    <a:pt x="2864901" y="2628481"/>
-                  </a:lnTo>
-                  <a:lnTo>
-                    <a:pt x="2793278" y="2627407"/>
-                  </a:lnTo>
-                  <a:lnTo>
-                    <a:pt x="2721655" y="2626330"/>
-                  </a:lnTo>
-                  <a:lnTo>
-                    <a:pt x="2650033" y="2625253"/>
-                  </a:lnTo>
-                  <a:lnTo>
-                    <a:pt x="2578410" y="2624174"/>
-                  </a:lnTo>
-                  <a:lnTo>
-                    <a:pt x="2506788" y="2623094"/>
-                  </a:lnTo>
-                  <a:lnTo>
-                    <a:pt x="2435165" y="2622012"/>
-                  </a:lnTo>
-                  <a:lnTo>
-                    <a:pt x="2363543" y="2620929"/>
-                  </a:lnTo>
-                  <a:lnTo>
-                    <a:pt x="2291920" y="2619845"/>
-                  </a:lnTo>
-                  <a:lnTo>
-                    <a:pt x="2220298" y="2618759"/>
-                  </a:lnTo>
-                  <a:lnTo>
-                    <a:pt x="2148675" y="2617672"/>
-                  </a:lnTo>
-                  <a:lnTo>
-                    <a:pt x="2077053" y="2616583"/>
-                  </a:lnTo>
-                  <a:lnTo>
-                    <a:pt x="2005430" y="2615494"/>
-                  </a:lnTo>
-                  <a:lnTo>
-                    <a:pt x="1933808" y="2614402"/>
-                  </a:lnTo>
-                  <a:lnTo>
-                    <a:pt x="1862185" y="2613310"/>
-                  </a:lnTo>
-                  <a:lnTo>
-                    <a:pt x="1790563" y="2612216"/>
-                  </a:lnTo>
-                  <a:lnTo>
-                    <a:pt x="1718940" y="2611121"/>
-                  </a:lnTo>
-                  <a:lnTo>
-                    <a:pt x="1647318" y="2610024"/>
-                  </a:lnTo>
-                  <a:lnTo>
-                    <a:pt x="1575695" y="2608926"/>
-                  </a:lnTo>
-                  <a:lnTo>
-                    <a:pt x="1504073" y="2607827"/>
-                  </a:lnTo>
-                  <a:lnTo>
-                    <a:pt x="1432450" y="2606726"/>
-                  </a:lnTo>
-                  <a:lnTo>
-                    <a:pt x="1360827" y="2605624"/>
-                  </a:lnTo>
-                  <a:lnTo>
-                    <a:pt x="1289205" y="2604520"/>
-                  </a:lnTo>
-                  <a:lnTo>
-                    <a:pt x="1217582" y="2603415"/>
-                  </a:lnTo>
-                  <a:lnTo>
-                    <a:pt x="1145960" y="2602309"/>
-                  </a:lnTo>
-                  <a:lnTo>
-                    <a:pt x="1074337" y="2601201"/>
-                  </a:lnTo>
-                  <a:lnTo>
-                    <a:pt x="1002715" y="2600092"/>
-                  </a:lnTo>
-                  <a:lnTo>
-                    <a:pt x="931092" y="2598981"/>
-                  </a:lnTo>
-                  <a:lnTo>
-                    <a:pt x="859470" y="2597869"/>
-                  </a:lnTo>
-                  <a:lnTo>
-                    <a:pt x="787847" y="2596756"/>
-                  </a:lnTo>
-                  <a:lnTo>
-                    <a:pt x="716225" y="2595641"/>
-                  </a:lnTo>
-                  <a:lnTo>
-                    <a:pt x="644602" y="2594525"/>
-                  </a:lnTo>
-                  <a:lnTo>
-                    <a:pt x="572980" y="2593408"/>
-                  </a:lnTo>
-                  <a:lnTo>
-                    <a:pt x="501357" y="2592289"/>
-                  </a:lnTo>
-                  <a:lnTo>
-                    <a:pt x="429735" y="2591168"/>
-                  </a:lnTo>
-                  <a:lnTo>
-                    <a:pt x="358112" y="2590047"/>
-                  </a:lnTo>
-                  <a:lnTo>
-                    <a:pt x="286490" y="2588923"/>
-                  </a:lnTo>
-                  <a:lnTo>
-                    <a:pt x="214867" y="2587799"/>
-                  </a:lnTo>
-                  <a:lnTo>
-                    <a:pt x="143245" y="2586673"/>
-                  </a:lnTo>
-                  <a:lnTo>
-                    <a:pt x="71622" y="2585546"/>
-                  </a:lnTo>
-                  <a:lnTo>
-                    <a:pt x="0" y="2584417"/>
+                    <a:pt x="1002715" y="62027"/>
+                  </a:lnTo>
+                  <a:lnTo>
+                    <a:pt x="1074337" y="156675"/>
+                  </a:lnTo>
+                  <a:lnTo>
+                    <a:pt x="1145960" y="248705"/>
+                  </a:lnTo>
+                  <a:lnTo>
+                    <a:pt x="1217582" y="338189"/>
+                  </a:lnTo>
+                  <a:lnTo>
+                    <a:pt x="1289205" y="425198"/>
+                  </a:lnTo>
+                  <a:lnTo>
+                    <a:pt x="1360827" y="509801"/>
+                  </a:lnTo>
+                  <a:lnTo>
+                    <a:pt x="1432450" y="592063"/>
+                  </a:lnTo>
+                  <a:lnTo>
+                    <a:pt x="1504073" y="672049"/>
+                  </a:lnTo>
+                  <a:lnTo>
+                    <a:pt x="1575695" y="749824"/>
+                  </a:lnTo>
+                  <a:lnTo>
+                    <a:pt x="1647318" y="825446"/>
+                  </a:lnTo>
+                  <a:lnTo>
+                    <a:pt x="1718940" y="898977"/>
+                  </a:lnTo>
+                  <a:lnTo>
+                    <a:pt x="1790563" y="970475"/>
+                  </a:lnTo>
+                  <a:lnTo>
+                    <a:pt x="1862185" y="1039994"/>
+                  </a:lnTo>
+                  <a:lnTo>
+                    <a:pt x="1933808" y="1107590"/>
+                  </a:lnTo>
+                  <a:lnTo>
+                    <a:pt x="2005430" y="1173317"/>
+                  </a:lnTo>
+                  <a:lnTo>
+                    <a:pt x="2077053" y="1237226"/>
+                  </a:lnTo>
+                  <a:lnTo>
+                    <a:pt x="2148675" y="1299367"/>
+                  </a:lnTo>
+                  <a:lnTo>
+                    <a:pt x="2220298" y="1359789"/>
+                  </a:lnTo>
+                  <a:lnTo>
+                    <a:pt x="2291920" y="1418539"/>
+                  </a:lnTo>
+                  <a:lnTo>
+                    <a:pt x="2363543" y="1475665"/>
+                  </a:lnTo>
+                  <a:lnTo>
+                    <a:pt x="2435165" y="1531210"/>
+                  </a:lnTo>
+                  <a:lnTo>
+                    <a:pt x="2506788" y="1585219"/>
+                  </a:lnTo>
+                  <a:lnTo>
+                    <a:pt x="2578410" y="1637734"/>
+                  </a:lnTo>
+                  <a:lnTo>
+                    <a:pt x="2650033" y="1688797"/>
+                  </a:lnTo>
+                  <a:lnTo>
+                    <a:pt x="2721655" y="1738447"/>
+                  </a:lnTo>
+                  <a:lnTo>
+                    <a:pt x="2793278" y="1786723"/>
+                  </a:lnTo>
+                  <a:lnTo>
+                    <a:pt x="2864901" y="1833664"/>
+                  </a:lnTo>
+                  <a:lnTo>
+                    <a:pt x="2936523" y="1879307"/>
+                  </a:lnTo>
+                  <a:lnTo>
+                    <a:pt x="3008146" y="1923688"/>
+                  </a:lnTo>
+                  <a:lnTo>
+                    <a:pt x="3079768" y="1966840"/>
+                  </a:lnTo>
+                  <a:lnTo>
+                    <a:pt x="3151391" y="2008799"/>
+                  </a:lnTo>
+                  <a:lnTo>
+                    <a:pt x="3223013" y="2049598"/>
+                  </a:lnTo>
+                  <a:lnTo>
+                    <a:pt x="3294636" y="2089268"/>
+                  </a:lnTo>
+                  <a:lnTo>
+                    <a:pt x="3366258" y="2127840"/>
+                  </a:lnTo>
+                  <a:lnTo>
+                    <a:pt x="3437881" y="2165346"/>
+                  </a:lnTo>
+                  <a:lnTo>
+                    <a:pt x="3509503" y="2201814"/>
+                  </a:lnTo>
+                  <a:lnTo>
+                    <a:pt x="3581126" y="2237273"/>
+                  </a:lnTo>
+                  <a:lnTo>
+                    <a:pt x="3652748" y="2271752"/>
+                  </a:lnTo>
+                  <a:lnTo>
+                    <a:pt x="3724371" y="2305277"/>
+                  </a:lnTo>
+                  <a:lnTo>
+                    <a:pt x="3795993" y="2337874"/>
+                  </a:lnTo>
+                  <a:lnTo>
+                    <a:pt x="3867616" y="2369570"/>
+                  </a:lnTo>
+                  <a:lnTo>
+                    <a:pt x="3939238" y="2400389"/>
+                  </a:lnTo>
+                  <a:lnTo>
+                    <a:pt x="4010861" y="2430356"/>
+                  </a:lnTo>
+                  <a:lnTo>
+                    <a:pt x="4082483" y="2459494"/>
+                  </a:lnTo>
+                  <a:lnTo>
+                    <a:pt x="4154106" y="2487826"/>
+                  </a:lnTo>
+                  <a:lnTo>
+                    <a:pt x="4225729" y="2515374"/>
+                  </a:lnTo>
+                  <a:lnTo>
+                    <a:pt x="4297351" y="2542160"/>
+                  </a:lnTo>
+                  <a:lnTo>
+                    <a:pt x="4368974" y="2568205"/>
+                  </a:lnTo>
+                  <a:lnTo>
+                    <a:pt x="4440596" y="2593530"/>
+                  </a:lnTo>
+                  <a:lnTo>
+                    <a:pt x="4512219" y="2618154"/>
+                  </a:lnTo>
+                  <a:lnTo>
+                    <a:pt x="4583841" y="2642097"/>
+                  </a:lnTo>
+                  <a:lnTo>
+                    <a:pt x="4655464" y="2654882"/>
+                  </a:lnTo>
+                  <a:lnTo>
+                    <a:pt x="4727086" y="2656128"/>
+                  </a:lnTo>
+                  <a:lnTo>
+                    <a:pt x="4798709" y="2657372"/>
+                  </a:lnTo>
+                  <a:lnTo>
+                    <a:pt x="4870331" y="2658614"/>
+                  </a:lnTo>
+                  <a:lnTo>
+                    <a:pt x="4941954" y="2659854"/>
+                  </a:lnTo>
+                  <a:lnTo>
+                    <a:pt x="5013576" y="2661092"/>
+                  </a:lnTo>
+                  <a:lnTo>
+                    <a:pt x="5085199" y="2662329"/>
+                  </a:lnTo>
+                  <a:lnTo>
+                    <a:pt x="5156821" y="2663564"/>
+                  </a:lnTo>
+                  <a:lnTo>
+                    <a:pt x="5228444" y="2664797"/>
+                  </a:lnTo>
+                  <a:lnTo>
+                    <a:pt x="5300066" y="2666028"/>
+                  </a:lnTo>
+                  <a:lnTo>
+                    <a:pt x="5371689" y="2667257"/>
+                  </a:lnTo>
+                  <a:lnTo>
+                    <a:pt x="5443311" y="2668484"/>
+                  </a:lnTo>
+                  <a:lnTo>
+                    <a:pt x="5514934" y="2669709"/>
+                  </a:lnTo>
+                  <a:lnTo>
+                    <a:pt x="5586557" y="2670933"/>
+                  </a:lnTo>
+                  <a:lnTo>
+                    <a:pt x="5658179" y="2672155"/>
+                  </a:lnTo>
+                  <a:lnTo>
+                    <a:pt x="5729802" y="2673375"/>
+                  </a:lnTo>
+                  <a:lnTo>
+                    <a:pt x="5801424" y="2674593"/>
+                  </a:lnTo>
+                  <a:lnTo>
+                    <a:pt x="5873047" y="2675809"/>
+                  </a:lnTo>
+                  <a:lnTo>
+                    <a:pt x="5944669" y="2677024"/>
+                  </a:lnTo>
+                  <a:lnTo>
+                    <a:pt x="6016292" y="2678236"/>
+                  </a:lnTo>
+                  <a:lnTo>
+                    <a:pt x="6087914" y="2679447"/>
+                  </a:lnTo>
+                  <a:lnTo>
+                    <a:pt x="6159537" y="2680656"/>
+                  </a:lnTo>
+                  <a:lnTo>
+                    <a:pt x="6231159" y="2681863"/>
+                  </a:lnTo>
+                  <a:lnTo>
+                    <a:pt x="6302782" y="2683068"/>
+                  </a:lnTo>
+                  <a:lnTo>
+                    <a:pt x="6374404" y="2684272"/>
+                  </a:lnTo>
+                  <a:lnTo>
+                    <a:pt x="6446027" y="2685474"/>
+                  </a:lnTo>
+                  <a:lnTo>
+                    <a:pt x="6517649" y="2686674"/>
+                  </a:lnTo>
+                  <a:lnTo>
+                    <a:pt x="6589272" y="2687872"/>
+                  </a:lnTo>
+                  <a:lnTo>
+                    <a:pt x="6660894" y="2689068"/>
+                  </a:lnTo>
+                  <a:lnTo>
+                    <a:pt x="6732517" y="2690263"/>
+                  </a:lnTo>
+                  <a:lnTo>
+                    <a:pt x="6804139" y="2691455"/>
+                  </a:lnTo>
+                  <a:lnTo>
+                    <a:pt x="6875762" y="2692646"/>
+                  </a:lnTo>
+                  <a:lnTo>
+                    <a:pt x="6947385" y="2693835"/>
+                  </a:lnTo>
+                  <a:lnTo>
+                    <a:pt x="7019007" y="2695023"/>
+                  </a:lnTo>
+                  <a:lnTo>
+                    <a:pt x="7090630" y="2696208"/>
+                  </a:lnTo>
+                  <a:lnTo>
+                    <a:pt x="7090630" y="3168426"/>
+                  </a:lnTo>
+                  <a:lnTo>
+                    <a:pt x="7019007" y="3159456"/>
+                  </a:lnTo>
+                  <a:lnTo>
+                    <a:pt x="6947385" y="3150231"/>
+                  </a:lnTo>
+                  <a:lnTo>
+                    <a:pt x="6875762" y="3140743"/>
+                  </a:lnTo>
+                  <a:lnTo>
+                    <a:pt x="6804139" y="3130985"/>
+                  </a:lnTo>
+                  <a:lnTo>
+                    <a:pt x="6732517" y="3120950"/>
+                  </a:lnTo>
+                  <a:lnTo>
+                    <a:pt x="6660894" y="3110629"/>
+                  </a:lnTo>
+                  <a:lnTo>
+                    <a:pt x="6589272" y="3100015"/>
+                  </a:lnTo>
+                  <a:lnTo>
+                    <a:pt x="6517649" y="3089098"/>
+                  </a:lnTo>
+                  <a:lnTo>
+                    <a:pt x="6446027" y="3077871"/>
+                  </a:lnTo>
+                  <a:lnTo>
+                    <a:pt x="6374404" y="3066325"/>
+                  </a:lnTo>
+                  <a:lnTo>
+                    <a:pt x="6302782" y="3054450"/>
+                  </a:lnTo>
+                  <a:lnTo>
+                    <a:pt x="6231159" y="3042238"/>
+                  </a:lnTo>
+                  <a:lnTo>
+                    <a:pt x="6159537" y="3029678"/>
+                  </a:lnTo>
+                  <a:lnTo>
+                    <a:pt x="6087914" y="3016761"/>
+                  </a:lnTo>
+                  <a:lnTo>
+                    <a:pt x="6016292" y="3003476"/>
+                  </a:lnTo>
+                  <a:lnTo>
+                    <a:pt x="5944669" y="2989813"/>
+                  </a:lnTo>
+                  <a:lnTo>
+                    <a:pt x="5873047" y="2975762"/>
+                  </a:lnTo>
+                  <a:lnTo>
+                    <a:pt x="5801424" y="2961311"/>
+                  </a:lnTo>
+                  <a:lnTo>
+                    <a:pt x="5729802" y="2946449"/>
+                  </a:lnTo>
+                  <a:lnTo>
+                    <a:pt x="5658179" y="2931164"/>
+                  </a:lnTo>
+                  <a:lnTo>
+                    <a:pt x="5586557" y="2915444"/>
+                  </a:lnTo>
+                  <a:lnTo>
+                    <a:pt x="5514934" y="2899277"/>
+                  </a:lnTo>
+                  <a:lnTo>
+                    <a:pt x="5443311" y="2882650"/>
+                  </a:lnTo>
+                  <a:lnTo>
+                    <a:pt x="5371689" y="2865550"/>
+                  </a:lnTo>
+                  <a:lnTo>
+                    <a:pt x="5300066" y="2847964"/>
+                  </a:lnTo>
+                  <a:lnTo>
+                    <a:pt x="5228444" y="2829877"/>
+                  </a:lnTo>
+                  <a:lnTo>
+                    <a:pt x="5156821" y="2811276"/>
+                  </a:lnTo>
+                  <a:lnTo>
+                    <a:pt x="5085199" y="2792146"/>
+                  </a:lnTo>
+                  <a:lnTo>
+                    <a:pt x="5013576" y="2772471"/>
+                  </a:lnTo>
+                  <a:lnTo>
+                    <a:pt x="4941954" y="2752237"/>
+                  </a:lnTo>
+                  <a:lnTo>
+                    <a:pt x="4870331" y="2731427"/>
+                  </a:lnTo>
+                  <a:lnTo>
+                    <a:pt x="4798709" y="2710025"/>
+                  </a:lnTo>
+                  <a:lnTo>
+                    <a:pt x="4727086" y="2688015"/>
+                  </a:lnTo>
+                  <a:lnTo>
+                    <a:pt x="4655464" y="2665378"/>
+                  </a:lnTo>
+                  <a:lnTo>
+                    <a:pt x="4583841" y="2653634"/>
+                  </a:lnTo>
+                  <a:lnTo>
+                    <a:pt x="4512219" y="2652384"/>
+                  </a:lnTo>
+                  <a:lnTo>
+                    <a:pt x="4440596" y="2651133"/>
+                  </a:lnTo>
+                  <a:lnTo>
+                    <a:pt x="4368974" y="2649879"/>
+                  </a:lnTo>
+                  <a:lnTo>
+                    <a:pt x="4297351" y="2648624"/>
+                  </a:lnTo>
+                  <a:lnTo>
+                    <a:pt x="4225729" y="2647367"/>
+                  </a:lnTo>
+                  <a:lnTo>
+                    <a:pt x="4154106" y="2646108"/>
+                  </a:lnTo>
+                  <a:lnTo>
+                    <a:pt x="4082483" y="2644847"/>
+                  </a:lnTo>
+                  <a:lnTo>
+                    <a:pt x="4010861" y="2643584"/>
+                  </a:lnTo>
+                  <a:lnTo>
+                    <a:pt x="3939238" y="2642319"/>
+                  </a:lnTo>
+                  <a:lnTo>
+                    <a:pt x="3867616" y="2641052"/>
+                  </a:lnTo>
+                  <a:lnTo>
+                    <a:pt x="3795993" y="2639784"/>
+                  </a:lnTo>
+                  <a:lnTo>
+                    <a:pt x="3724371" y="2638513"/>
+                  </a:lnTo>
+                  <a:lnTo>
+                    <a:pt x="3652748" y="2637241"/>
+                  </a:lnTo>
+                  <a:lnTo>
+                    <a:pt x="3581126" y="2635967"/>
+                  </a:lnTo>
+                  <a:lnTo>
+                    <a:pt x="3509503" y="2634690"/>
+                  </a:lnTo>
+                  <a:lnTo>
+                    <a:pt x="3437881" y="2633412"/>
+                  </a:lnTo>
+                  <a:lnTo>
+                    <a:pt x="3366258" y="2632132"/>
+                  </a:lnTo>
+                  <a:lnTo>
+                    <a:pt x="3294636" y="2630850"/>
+                  </a:lnTo>
+                  <a:lnTo>
+                    <a:pt x="3223013" y="2629566"/>
+                  </a:lnTo>
+                  <a:lnTo>
+                    <a:pt x="3151391" y="2628280"/>
+                  </a:lnTo>
+                  <a:lnTo>
+                    <a:pt x="3079768" y="2626992"/>
+                  </a:lnTo>
+                  <a:lnTo>
+                    <a:pt x="3008146" y="2625703"/>
+                  </a:lnTo>
+                  <a:lnTo>
+                    <a:pt x="2936523" y="2624411"/>
+                  </a:lnTo>
+                  <a:lnTo>
+                    <a:pt x="2864901" y="2623117"/>
+                  </a:lnTo>
+                  <a:lnTo>
+                    <a:pt x="2793278" y="2621822"/>
+                  </a:lnTo>
+                  <a:lnTo>
+                    <a:pt x="2721655" y="2620524"/>
+                  </a:lnTo>
+                  <a:lnTo>
+                    <a:pt x="2650033" y="2619225"/>
+                  </a:lnTo>
+                  <a:lnTo>
+                    <a:pt x="2578410" y="2617923"/>
+                  </a:lnTo>
+                  <a:lnTo>
+                    <a:pt x="2506788" y="2616620"/>
+                  </a:lnTo>
+                  <a:lnTo>
+                    <a:pt x="2435165" y="2615314"/>
+                  </a:lnTo>
+                  <a:lnTo>
+                    <a:pt x="2363543" y="2614007"/>
+                  </a:lnTo>
+                  <a:lnTo>
+                    <a:pt x="2291920" y="2612698"/>
+                  </a:lnTo>
+                  <a:lnTo>
+                    <a:pt x="2220298" y="2611386"/>
+                  </a:lnTo>
+                  <a:lnTo>
+                    <a:pt x="2148675" y="2610073"/>
+                  </a:lnTo>
+                  <a:lnTo>
+                    <a:pt x="2077053" y="2608758"/>
+                  </a:lnTo>
+                  <a:lnTo>
+                    <a:pt x="2005430" y="2607441"/>
+                  </a:lnTo>
+                  <a:lnTo>
+                    <a:pt x="1933808" y="2606122"/>
+                  </a:lnTo>
+                  <a:lnTo>
+                    <a:pt x="1862185" y="2604800"/>
+                  </a:lnTo>
+                  <a:lnTo>
+                    <a:pt x="1790563" y="2603477"/>
+                  </a:lnTo>
+                  <a:lnTo>
+                    <a:pt x="1718940" y="2602152"/>
+                  </a:lnTo>
+                  <a:lnTo>
+                    <a:pt x="1647318" y="2600825"/>
+                  </a:lnTo>
+                  <a:lnTo>
+                    <a:pt x="1575695" y="2599496"/>
+                  </a:lnTo>
+                  <a:lnTo>
+                    <a:pt x="1504073" y="2598165"/>
+                  </a:lnTo>
+                  <a:lnTo>
+                    <a:pt x="1432450" y="2596832"/>
+                  </a:lnTo>
+                  <a:lnTo>
+                    <a:pt x="1360827" y="2595496"/>
+                  </a:lnTo>
+                  <a:lnTo>
+                    <a:pt x="1289205" y="2594159"/>
+                  </a:lnTo>
+                  <a:lnTo>
+                    <a:pt x="1217582" y="2592820"/>
+                  </a:lnTo>
+                  <a:lnTo>
+                    <a:pt x="1145960" y="2591479"/>
+                  </a:lnTo>
+                  <a:lnTo>
+                    <a:pt x="1074337" y="2590136"/>
+                  </a:lnTo>
+                  <a:lnTo>
+                    <a:pt x="1002715" y="2588790"/>
+                  </a:lnTo>
+                  <a:lnTo>
+                    <a:pt x="931092" y="2587443"/>
+                  </a:lnTo>
+                  <a:lnTo>
+                    <a:pt x="859470" y="2586094"/>
+                  </a:lnTo>
+                  <a:lnTo>
+                    <a:pt x="787847" y="2584742"/>
+                  </a:lnTo>
+                  <a:lnTo>
+                    <a:pt x="716225" y="2583389"/>
+                  </a:lnTo>
+                  <a:lnTo>
+                    <a:pt x="644602" y="2582034"/>
+                  </a:lnTo>
+                  <a:lnTo>
+                    <a:pt x="572980" y="2580676"/>
+                  </a:lnTo>
+                  <a:lnTo>
+                    <a:pt x="501357" y="2579317"/>
+                  </a:lnTo>
+                  <a:lnTo>
+                    <a:pt x="429735" y="2577955"/>
+                  </a:lnTo>
+                  <a:lnTo>
+                    <a:pt x="358112" y="2576592"/>
+                  </a:lnTo>
+                  <a:lnTo>
+                    <a:pt x="286490" y="2575226"/>
+                  </a:lnTo>
+                  <a:lnTo>
+                    <a:pt x="214867" y="2573858"/>
+                  </a:lnTo>
+                  <a:lnTo>
+                    <a:pt x="143245" y="2572489"/>
+                  </a:lnTo>
+                  <a:lnTo>
+                    <a:pt x="71622" y="2571117"/>
+                  </a:lnTo>
+                  <a:lnTo>
+                    <a:pt x="0" y="2569743"/>
                   </a:lnTo>
                   <a:close/>
                 </a:path>
@@ -3508,273 +3508,273 @@
           </p:nvSpPr>
           <p:spPr>
             <a:xfrm>
-              <a:off x="2120139" y="2073503"/>
-              <a:ext cx="6142540" cy="2689567"/>
+              <a:off x="2129125" y="2073503"/>
+              <a:ext cx="6133554" cy="2696208"/>
             </a:xfrm>
             <a:custGeom>
               <a:avLst/>
               <a:pathLst>
-                <a:path w="6142540" h="2689567">
+                <a:path w="6133554" h="2696208">
                   <a:moveTo>
                     <a:pt x="0" y="0"/>
                   </a:moveTo>
                   <a:lnTo>
-                    <a:pt x="54625" y="73989"/>
-                  </a:lnTo>
-                  <a:lnTo>
-                    <a:pt x="126248" y="168316"/>
-                  </a:lnTo>
-                  <a:lnTo>
-                    <a:pt x="197870" y="260034"/>
-                  </a:lnTo>
-                  <a:lnTo>
-                    <a:pt x="269493" y="349214"/>
-                  </a:lnTo>
-                  <a:lnTo>
-                    <a:pt x="341115" y="435928"/>
-                  </a:lnTo>
-                  <a:lnTo>
-                    <a:pt x="412738" y="520243"/>
-                  </a:lnTo>
-                  <a:lnTo>
-                    <a:pt x="484360" y="602225"/>
-                  </a:lnTo>
-                  <a:lnTo>
-                    <a:pt x="555983" y="681939"/>
-                  </a:lnTo>
-                  <a:lnTo>
-                    <a:pt x="627605" y="759448"/>
-                  </a:lnTo>
-                  <a:lnTo>
-                    <a:pt x="699228" y="834813"/>
-                  </a:lnTo>
-                  <a:lnTo>
-                    <a:pt x="770850" y="908093"/>
-                  </a:lnTo>
-                  <a:lnTo>
-                    <a:pt x="842473" y="979346"/>
-                  </a:lnTo>
-                  <a:lnTo>
-                    <a:pt x="914095" y="1048627"/>
-                  </a:lnTo>
-                  <a:lnTo>
-                    <a:pt x="985718" y="1115992"/>
-                  </a:lnTo>
-                  <a:lnTo>
-                    <a:pt x="1057340" y="1181494"/>
-                  </a:lnTo>
-                  <a:lnTo>
-                    <a:pt x="1128963" y="1245183"/>
-                  </a:lnTo>
-                  <a:lnTo>
-                    <a:pt x="1200586" y="1307111"/>
-                  </a:lnTo>
-                  <a:lnTo>
-                    <a:pt x="1272208" y="1367325"/>
-                  </a:lnTo>
-                  <a:lnTo>
-                    <a:pt x="1343831" y="1425873"/>
-                  </a:lnTo>
-                  <a:lnTo>
-                    <a:pt x="1415453" y="1482802"/>
-                  </a:lnTo>
-                  <a:lnTo>
-                    <a:pt x="1487076" y="1538156"/>
-                  </a:lnTo>
-                  <a:lnTo>
-                    <a:pt x="1558698" y="1591979"/>
-                  </a:lnTo>
-                  <a:lnTo>
-                    <a:pt x="1630321" y="1644313"/>
-                  </a:lnTo>
-                  <a:lnTo>
-                    <a:pt x="1701943" y="1695199"/>
-                  </a:lnTo>
-                  <a:lnTo>
-                    <a:pt x="1773566" y="1744677"/>
-                  </a:lnTo>
-                  <a:lnTo>
-                    <a:pt x="1845188" y="1792787"/>
-                  </a:lnTo>
-                  <a:lnTo>
-                    <a:pt x="1916811" y="1839565"/>
-                  </a:lnTo>
-                  <a:lnTo>
-                    <a:pt x="1988433" y="1885050"/>
-                  </a:lnTo>
-                  <a:lnTo>
-                    <a:pt x="2060056" y="1929276"/>
-                  </a:lnTo>
-                  <a:lnTo>
-                    <a:pt x="2131678" y="1972279"/>
-                  </a:lnTo>
-                  <a:lnTo>
-                    <a:pt x="2203301" y="2014092"/>
-                  </a:lnTo>
-                  <a:lnTo>
-                    <a:pt x="2274923" y="2054748"/>
-                  </a:lnTo>
-                  <a:lnTo>
-                    <a:pt x="2346546" y="2094280"/>
-                  </a:lnTo>
-                  <a:lnTo>
-                    <a:pt x="2418168" y="2132718"/>
-                  </a:lnTo>
-                  <a:lnTo>
-                    <a:pt x="2489791" y="2170093"/>
-                  </a:lnTo>
-                  <a:lnTo>
-                    <a:pt x="2561414" y="2206434"/>
-                  </a:lnTo>
-                  <a:lnTo>
-                    <a:pt x="2633036" y="2241769"/>
-                  </a:lnTo>
-                  <a:lnTo>
-                    <a:pt x="2704659" y="2276127"/>
-                  </a:lnTo>
-                  <a:lnTo>
-                    <a:pt x="2776281" y="2309535"/>
-                  </a:lnTo>
-                  <a:lnTo>
-                    <a:pt x="2847904" y="2342018"/>
-                  </a:lnTo>
-                  <a:lnTo>
-                    <a:pt x="2919526" y="2373603"/>
-                  </a:lnTo>
-                  <a:lnTo>
-                    <a:pt x="2991149" y="2404314"/>
-                  </a:lnTo>
-                  <a:lnTo>
-                    <a:pt x="3062771" y="2434175"/>
-                  </a:lnTo>
-                  <a:lnTo>
-                    <a:pt x="3134394" y="2463210"/>
-                  </a:lnTo>
-                  <a:lnTo>
-                    <a:pt x="3206016" y="2491442"/>
-                  </a:lnTo>
-                  <a:lnTo>
-                    <a:pt x="3277639" y="2518894"/>
-                  </a:lnTo>
-                  <a:lnTo>
-                    <a:pt x="3349261" y="2545585"/>
-                  </a:lnTo>
-                  <a:lnTo>
-                    <a:pt x="3420884" y="2571538"/>
-                  </a:lnTo>
-                  <a:lnTo>
-                    <a:pt x="3492506" y="2596774"/>
-                  </a:lnTo>
-                  <a:lnTo>
-                    <a:pt x="3564129" y="2621311"/>
-                  </a:lnTo>
-                  <a:lnTo>
-                    <a:pt x="3635751" y="2645169"/>
-                  </a:lnTo>
-                  <a:lnTo>
-                    <a:pt x="3707374" y="2654919"/>
-                  </a:lnTo>
-                  <a:lnTo>
-                    <a:pt x="3778996" y="2655959"/>
-                  </a:lnTo>
-                  <a:lnTo>
-                    <a:pt x="3850619" y="2656998"/>
-                  </a:lnTo>
-                  <a:lnTo>
-                    <a:pt x="3922242" y="2658036"/>
-                  </a:lnTo>
-                  <a:lnTo>
-                    <a:pt x="3993864" y="2659072"/>
-                  </a:lnTo>
-                  <a:lnTo>
-                    <a:pt x="4065487" y="2660107"/>
-                  </a:lnTo>
-                  <a:lnTo>
-                    <a:pt x="4137109" y="2661141"/>
-                  </a:lnTo>
-                  <a:lnTo>
-                    <a:pt x="4208732" y="2662173"/>
-                  </a:lnTo>
-                  <a:lnTo>
-                    <a:pt x="4280354" y="2663205"/>
-                  </a:lnTo>
-                  <a:lnTo>
-                    <a:pt x="4351977" y="2664235"/>
-                  </a:lnTo>
-                  <a:lnTo>
-                    <a:pt x="4423599" y="2665263"/>
-                  </a:lnTo>
-                  <a:lnTo>
-                    <a:pt x="4495222" y="2666291"/>
-                  </a:lnTo>
-                  <a:lnTo>
-                    <a:pt x="4566844" y="2667317"/>
-                  </a:lnTo>
-                  <a:lnTo>
-                    <a:pt x="4638467" y="2668341"/>
-                  </a:lnTo>
-                  <a:lnTo>
-                    <a:pt x="4710089" y="2669365"/>
-                  </a:lnTo>
-                  <a:lnTo>
-                    <a:pt x="4781712" y="2670387"/>
-                  </a:lnTo>
-                  <a:lnTo>
-                    <a:pt x="4853334" y="2671408"/>
-                  </a:lnTo>
-                  <a:lnTo>
-                    <a:pt x="4924957" y="2672428"/>
-                  </a:lnTo>
-                  <a:lnTo>
-                    <a:pt x="4996579" y="2673446"/>
-                  </a:lnTo>
-                  <a:lnTo>
-                    <a:pt x="5068202" y="2674463"/>
-                  </a:lnTo>
-                  <a:lnTo>
-                    <a:pt x="5139824" y="2675479"/>
-                  </a:lnTo>
-                  <a:lnTo>
-                    <a:pt x="5211447" y="2676493"/>
-                  </a:lnTo>
-                  <a:lnTo>
-                    <a:pt x="5283070" y="2677506"/>
-                  </a:lnTo>
-                  <a:lnTo>
-                    <a:pt x="5354692" y="2678518"/>
-                  </a:lnTo>
-                  <a:lnTo>
-                    <a:pt x="5426315" y="2679529"/>
-                  </a:lnTo>
-                  <a:lnTo>
-                    <a:pt x="5497937" y="2680539"/>
-                  </a:lnTo>
-                  <a:lnTo>
-                    <a:pt x="5569560" y="2681547"/>
-                  </a:lnTo>
-                  <a:lnTo>
-                    <a:pt x="5641182" y="2682554"/>
-                  </a:lnTo>
-                  <a:lnTo>
-                    <a:pt x="5712805" y="2683559"/>
-                  </a:lnTo>
-                  <a:lnTo>
-                    <a:pt x="5784427" y="2684564"/>
-                  </a:lnTo>
-                  <a:lnTo>
-                    <a:pt x="5856050" y="2685567"/>
-                  </a:lnTo>
-                  <a:lnTo>
-                    <a:pt x="5927672" y="2686569"/>
-                  </a:lnTo>
-                  <a:lnTo>
-                    <a:pt x="5999295" y="2687569"/>
-                  </a:lnTo>
-                  <a:lnTo>
-                    <a:pt x="6070917" y="2688569"/>
-                  </a:lnTo>
-                  <a:lnTo>
-                    <a:pt x="6142540" y="2689567"/>
+                    <a:pt x="45639" y="62027"/>
+                  </a:lnTo>
+                  <a:lnTo>
+                    <a:pt x="117262" y="156675"/>
+                  </a:lnTo>
+                  <a:lnTo>
+                    <a:pt x="188884" y="248705"/>
+                  </a:lnTo>
+                  <a:lnTo>
+                    <a:pt x="260507" y="338189"/>
+                  </a:lnTo>
+                  <a:lnTo>
+                    <a:pt x="332129" y="425198"/>
+                  </a:lnTo>
+                  <a:lnTo>
+                    <a:pt x="403752" y="509801"/>
+                  </a:lnTo>
+                  <a:lnTo>
+                    <a:pt x="475374" y="592063"/>
+                  </a:lnTo>
+                  <a:lnTo>
+                    <a:pt x="546997" y="672049"/>
+                  </a:lnTo>
+                  <a:lnTo>
+                    <a:pt x="618619" y="749824"/>
+                  </a:lnTo>
+                  <a:lnTo>
+                    <a:pt x="690242" y="825446"/>
+                  </a:lnTo>
+                  <a:lnTo>
+                    <a:pt x="761864" y="898977"/>
+                  </a:lnTo>
+                  <a:lnTo>
+                    <a:pt x="833487" y="970475"/>
+                  </a:lnTo>
+                  <a:lnTo>
+                    <a:pt x="905109" y="1039994"/>
+                  </a:lnTo>
+                  <a:lnTo>
+                    <a:pt x="976732" y="1107590"/>
+                  </a:lnTo>
+                  <a:lnTo>
+                    <a:pt x="1048354" y="1173317"/>
+                  </a:lnTo>
+                  <a:lnTo>
+                    <a:pt x="1119977" y="1237226"/>
+                  </a:lnTo>
+                  <a:lnTo>
+                    <a:pt x="1191600" y="1299367"/>
+                  </a:lnTo>
+                  <a:lnTo>
+                    <a:pt x="1263222" y="1359789"/>
+                  </a:lnTo>
+                  <a:lnTo>
+                    <a:pt x="1334845" y="1418539"/>
+                  </a:lnTo>
+                  <a:lnTo>
+                    <a:pt x="1406467" y="1475665"/>
+                  </a:lnTo>
+                  <a:lnTo>
+                    <a:pt x="1478090" y="1531210"/>
+                  </a:lnTo>
+                  <a:lnTo>
+                    <a:pt x="1549712" y="1585219"/>
+                  </a:lnTo>
+                  <a:lnTo>
+                    <a:pt x="1621335" y="1637734"/>
+                  </a:lnTo>
+                  <a:lnTo>
+                    <a:pt x="1692957" y="1688797"/>
+                  </a:lnTo>
+                  <a:lnTo>
+                    <a:pt x="1764580" y="1738447"/>
+                  </a:lnTo>
+                  <a:lnTo>
+                    <a:pt x="1836202" y="1786723"/>
+                  </a:lnTo>
+                  <a:lnTo>
+                    <a:pt x="1907825" y="1833664"/>
+                  </a:lnTo>
+                  <a:lnTo>
+                    <a:pt x="1979447" y="1879307"/>
+                  </a:lnTo>
+                  <a:lnTo>
+                    <a:pt x="2051070" y="1923688"/>
+                  </a:lnTo>
+                  <a:lnTo>
+                    <a:pt x="2122692" y="1966840"/>
+                  </a:lnTo>
+                  <a:lnTo>
+                    <a:pt x="2194315" y="2008799"/>
+                  </a:lnTo>
+                  <a:lnTo>
+                    <a:pt x="2265937" y="2049598"/>
+                  </a:lnTo>
+                  <a:lnTo>
+                    <a:pt x="2337560" y="2089268"/>
+                  </a:lnTo>
+                  <a:lnTo>
+                    <a:pt x="2409182" y="2127840"/>
+                  </a:lnTo>
+                  <a:lnTo>
+                    <a:pt x="2480805" y="2165346"/>
+                  </a:lnTo>
+                  <a:lnTo>
+                    <a:pt x="2552428" y="2201814"/>
+                  </a:lnTo>
+                  <a:lnTo>
+                    <a:pt x="2624050" y="2237273"/>
+                  </a:lnTo>
+                  <a:lnTo>
+                    <a:pt x="2695673" y="2271752"/>
+                  </a:lnTo>
+                  <a:lnTo>
+                    <a:pt x="2767295" y="2305277"/>
+                  </a:lnTo>
+                  <a:lnTo>
+                    <a:pt x="2838918" y="2337874"/>
+                  </a:lnTo>
+                  <a:lnTo>
+                    <a:pt x="2910540" y="2369570"/>
+                  </a:lnTo>
+                  <a:lnTo>
+                    <a:pt x="2982163" y="2400389"/>
+                  </a:lnTo>
+                  <a:lnTo>
+                    <a:pt x="3053785" y="2430356"/>
+                  </a:lnTo>
+                  <a:lnTo>
+                    <a:pt x="3125408" y="2459494"/>
+                  </a:lnTo>
+                  <a:lnTo>
+                    <a:pt x="3197030" y="2487826"/>
+                  </a:lnTo>
+                  <a:lnTo>
+                    <a:pt x="3268653" y="2515374"/>
+                  </a:lnTo>
+                  <a:lnTo>
+                    <a:pt x="3340275" y="2542160"/>
+                  </a:lnTo>
+                  <a:lnTo>
+                    <a:pt x="3411898" y="2568205"/>
+                  </a:lnTo>
+                  <a:lnTo>
+                    <a:pt x="3483520" y="2593530"/>
+                  </a:lnTo>
+                  <a:lnTo>
+                    <a:pt x="3555143" y="2618154"/>
+                  </a:lnTo>
+                  <a:lnTo>
+                    <a:pt x="3626765" y="2642097"/>
+                  </a:lnTo>
+                  <a:lnTo>
+                    <a:pt x="3698388" y="2654882"/>
+                  </a:lnTo>
+                  <a:lnTo>
+                    <a:pt x="3770010" y="2656128"/>
+                  </a:lnTo>
+                  <a:lnTo>
+                    <a:pt x="3841633" y="2657372"/>
+                  </a:lnTo>
+                  <a:lnTo>
+                    <a:pt x="3913256" y="2658614"/>
+                  </a:lnTo>
+                  <a:lnTo>
+                    <a:pt x="3984878" y="2659854"/>
+                  </a:lnTo>
+                  <a:lnTo>
+                    <a:pt x="4056501" y="2661092"/>
+                  </a:lnTo>
+                  <a:lnTo>
+                    <a:pt x="4128123" y="2662329"/>
+                  </a:lnTo>
+                  <a:lnTo>
+                    <a:pt x="4199746" y="2663564"/>
+                  </a:lnTo>
+                  <a:lnTo>
+                    <a:pt x="4271368" y="2664797"/>
+                  </a:lnTo>
+                  <a:lnTo>
+                    <a:pt x="4342991" y="2666028"/>
+                  </a:lnTo>
+                  <a:lnTo>
+                    <a:pt x="4414613" y="2667257"/>
+                  </a:lnTo>
+                  <a:lnTo>
+                    <a:pt x="4486236" y="2668484"/>
+                  </a:lnTo>
+                  <a:lnTo>
+                    <a:pt x="4557858" y="2669709"/>
+                  </a:lnTo>
+                  <a:lnTo>
+                    <a:pt x="4629481" y="2670933"/>
+                  </a:lnTo>
+                  <a:lnTo>
+                    <a:pt x="4701103" y="2672155"/>
+                  </a:lnTo>
+                  <a:lnTo>
+                    <a:pt x="4772726" y="2673375"/>
+                  </a:lnTo>
+                  <a:lnTo>
+                    <a:pt x="4844348" y="2674593"/>
+                  </a:lnTo>
+                  <a:lnTo>
+                    <a:pt x="4915971" y="2675809"/>
+                  </a:lnTo>
+                  <a:lnTo>
+                    <a:pt x="4987593" y="2677024"/>
+                  </a:lnTo>
+                  <a:lnTo>
+                    <a:pt x="5059216" y="2678236"/>
+                  </a:lnTo>
+                  <a:lnTo>
+                    <a:pt x="5130838" y="2679447"/>
+                  </a:lnTo>
+                  <a:lnTo>
+                    <a:pt x="5202461" y="2680656"/>
+                  </a:lnTo>
+                  <a:lnTo>
+                    <a:pt x="5274084" y="2681863"/>
+                  </a:lnTo>
+                  <a:lnTo>
+                    <a:pt x="5345706" y="2683068"/>
+                  </a:lnTo>
+                  <a:lnTo>
+                    <a:pt x="5417329" y="2684272"/>
+                  </a:lnTo>
+                  <a:lnTo>
+                    <a:pt x="5488951" y="2685474"/>
+                  </a:lnTo>
+                  <a:lnTo>
+                    <a:pt x="5560574" y="2686674"/>
+                  </a:lnTo>
+                  <a:lnTo>
+                    <a:pt x="5632196" y="2687872"/>
+                  </a:lnTo>
+                  <a:lnTo>
+                    <a:pt x="5703819" y="2689068"/>
+                  </a:lnTo>
+                  <a:lnTo>
+                    <a:pt x="5775441" y="2690263"/>
+                  </a:lnTo>
+                  <a:lnTo>
+                    <a:pt x="5847064" y="2691455"/>
+                  </a:lnTo>
+                  <a:lnTo>
+                    <a:pt x="5918686" y="2692646"/>
+                  </a:lnTo>
+                  <a:lnTo>
+                    <a:pt x="5990309" y="2693835"/>
+                  </a:lnTo>
+                  <a:lnTo>
+                    <a:pt x="6061931" y="2695023"/>
+                  </a:lnTo>
+                  <a:lnTo>
+                    <a:pt x="6133554" y="2696208"/>
                   </a:lnTo>
                 </a:path>
               </a:pathLst>
@@ -3794,309 +3794,309 @@
           </p:nvSpPr>
           <p:spPr>
             <a:xfrm>
-              <a:off x="1172049" y="4657920"/>
-              <a:ext cx="7090630" cy="585194"/>
+              <a:off x="1172049" y="4643246"/>
+              <a:ext cx="7090630" cy="598683"/>
             </a:xfrm>
             <a:custGeom>
               <a:avLst/>
               <a:pathLst>
-                <a:path w="7090630" h="585194">
+                <a:path w="7090630" h="598683">
                   <a:moveTo>
-                    <a:pt x="7090630" y="585194"/>
+                    <a:pt x="7090630" y="598683"/>
                   </a:moveTo>
                   <a:lnTo>
-                    <a:pt x="7019007" y="576256"/>
-                  </a:lnTo>
-                  <a:lnTo>
-                    <a:pt x="6947385" y="567065"/>
-                  </a:lnTo>
-                  <a:lnTo>
-                    <a:pt x="6875762" y="557611"/>
-                  </a:lnTo>
-                  <a:lnTo>
-                    <a:pt x="6804139" y="547889"/>
-                  </a:lnTo>
-                  <a:lnTo>
-                    <a:pt x="6732517" y="537890"/>
-                  </a:lnTo>
-                  <a:lnTo>
-                    <a:pt x="6660894" y="527607"/>
-                  </a:lnTo>
-                  <a:lnTo>
-                    <a:pt x="6589272" y="517031"/>
-                  </a:lnTo>
-                  <a:lnTo>
-                    <a:pt x="6517649" y="506154"/>
-                  </a:lnTo>
-                  <a:lnTo>
-                    <a:pt x="6446027" y="494968"/>
-                  </a:lnTo>
-                  <a:lnTo>
-                    <a:pt x="6374404" y="483464"/>
-                  </a:lnTo>
-                  <a:lnTo>
-                    <a:pt x="6302782" y="471632"/>
-                  </a:lnTo>
-                  <a:lnTo>
-                    <a:pt x="6231159" y="459464"/>
-                  </a:lnTo>
-                  <a:lnTo>
-                    <a:pt x="6159537" y="446949"/>
-                  </a:lnTo>
-                  <a:lnTo>
-                    <a:pt x="6087914" y="434078"/>
-                  </a:lnTo>
-                  <a:lnTo>
-                    <a:pt x="6016292" y="420841"/>
-                  </a:lnTo>
-                  <a:lnTo>
-                    <a:pt x="5944669" y="407228"/>
-                  </a:lnTo>
-                  <a:lnTo>
-                    <a:pt x="5873047" y="393227"/>
-                  </a:lnTo>
-                  <a:lnTo>
-                    <a:pt x="5801424" y="378828"/>
-                  </a:lnTo>
-                  <a:lnTo>
-                    <a:pt x="5729802" y="364019"/>
-                  </a:lnTo>
-                  <a:lnTo>
-                    <a:pt x="5658179" y="348789"/>
-                  </a:lnTo>
-                  <a:lnTo>
-                    <a:pt x="5586557" y="333126"/>
-                  </a:lnTo>
-                  <a:lnTo>
-                    <a:pt x="5514934" y="317017"/>
-                  </a:lnTo>
-                  <a:lnTo>
-                    <a:pt x="5443311" y="300449"/>
-                  </a:lnTo>
-                  <a:lnTo>
-                    <a:pt x="5371689" y="283411"/>
-                  </a:lnTo>
-                  <a:lnTo>
-                    <a:pt x="5300066" y="265887"/>
-                  </a:lnTo>
-                  <a:lnTo>
-                    <a:pt x="5228444" y="247865"/>
-                  </a:lnTo>
-                  <a:lnTo>
-                    <a:pt x="5156821" y="229330"/>
-                  </a:lnTo>
-                  <a:lnTo>
-                    <a:pt x="5085199" y="210268"/>
-                  </a:lnTo>
-                  <a:lnTo>
-                    <a:pt x="5013576" y="190664"/>
-                  </a:lnTo>
-                  <a:lnTo>
-                    <a:pt x="4941954" y="170501"/>
-                  </a:lnTo>
-                  <a:lnTo>
-                    <a:pt x="4870331" y="149765"/>
-                  </a:lnTo>
-                  <a:lnTo>
-                    <a:pt x="4798709" y="128440"/>
-                  </a:lnTo>
-                  <a:lnTo>
-                    <a:pt x="4727086" y="106507"/>
-                  </a:lnTo>
-                  <a:lnTo>
-                    <a:pt x="4655464" y="83950"/>
-                  </a:lnTo>
-                  <a:lnTo>
-                    <a:pt x="4583841" y="69460"/>
-                  </a:lnTo>
-                  <a:lnTo>
-                    <a:pt x="4512219" y="68417"/>
-                  </a:lnTo>
-                  <a:lnTo>
-                    <a:pt x="4440596" y="67373"/>
-                  </a:lnTo>
-                  <a:lnTo>
-                    <a:pt x="4368974" y="66327"/>
-                  </a:lnTo>
-                  <a:lnTo>
-                    <a:pt x="4297351" y="65280"/>
-                  </a:lnTo>
-                  <a:lnTo>
-                    <a:pt x="4225729" y="64232"/>
-                  </a:lnTo>
-                  <a:lnTo>
-                    <a:pt x="4154106" y="63182"/>
-                  </a:lnTo>
-                  <a:lnTo>
-                    <a:pt x="4082483" y="62132"/>
-                  </a:lnTo>
-                  <a:lnTo>
-                    <a:pt x="4010861" y="61079"/>
-                  </a:lnTo>
-                  <a:lnTo>
-                    <a:pt x="3939238" y="60026"/>
-                  </a:lnTo>
-                  <a:lnTo>
-                    <a:pt x="3867616" y="58971"/>
-                  </a:lnTo>
-                  <a:lnTo>
-                    <a:pt x="3795993" y="57915"/>
-                  </a:lnTo>
-                  <a:lnTo>
-                    <a:pt x="3724371" y="56858"/>
-                  </a:lnTo>
-                  <a:lnTo>
-                    <a:pt x="3652748" y="55799"/>
-                  </a:lnTo>
-                  <a:lnTo>
-                    <a:pt x="3581126" y="54739"/>
-                  </a:lnTo>
-                  <a:lnTo>
-                    <a:pt x="3509503" y="53677"/>
-                  </a:lnTo>
-                  <a:lnTo>
-                    <a:pt x="3437881" y="52615"/>
-                  </a:lnTo>
-                  <a:lnTo>
-                    <a:pt x="3366258" y="51550"/>
-                  </a:lnTo>
-                  <a:lnTo>
-                    <a:pt x="3294636" y="50485"/>
-                  </a:lnTo>
-                  <a:lnTo>
-                    <a:pt x="3223013" y="49418"/>
-                  </a:lnTo>
-                  <a:lnTo>
-                    <a:pt x="3151391" y="48350"/>
-                  </a:lnTo>
-                  <a:lnTo>
-                    <a:pt x="3079768" y="47281"/>
-                  </a:lnTo>
-                  <a:lnTo>
-                    <a:pt x="3008146" y="46210"/>
-                  </a:lnTo>
-                  <a:lnTo>
-                    <a:pt x="2936523" y="45138"/>
-                  </a:lnTo>
-                  <a:lnTo>
-                    <a:pt x="2864901" y="44064"/>
-                  </a:lnTo>
-                  <a:lnTo>
-                    <a:pt x="2793278" y="42989"/>
-                  </a:lnTo>
-                  <a:lnTo>
-                    <a:pt x="2721655" y="41913"/>
-                  </a:lnTo>
-                  <a:lnTo>
-                    <a:pt x="2650033" y="40836"/>
-                  </a:lnTo>
-                  <a:lnTo>
-                    <a:pt x="2578410" y="39757"/>
-                  </a:lnTo>
-                  <a:lnTo>
-                    <a:pt x="2506788" y="38676"/>
-                  </a:lnTo>
-                  <a:lnTo>
-                    <a:pt x="2435165" y="37595"/>
-                  </a:lnTo>
-                  <a:lnTo>
-                    <a:pt x="2363543" y="36512"/>
-                  </a:lnTo>
-                  <a:lnTo>
-                    <a:pt x="2291920" y="35427"/>
-                  </a:lnTo>
-                  <a:lnTo>
-                    <a:pt x="2220298" y="34342"/>
-                  </a:lnTo>
-                  <a:lnTo>
-                    <a:pt x="2148675" y="33255"/>
-                  </a:lnTo>
-                  <a:lnTo>
-                    <a:pt x="2077053" y="32166"/>
-                  </a:lnTo>
-                  <a:lnTo>
-                    <a:pt x="2005430" y="31076"/>
-                  </a:lnTo>
-                  <a:lnTo>
-                    <a:pt x="1933808" y="29985"/>
-                  </a:lnTo>
-                  <a:lnTo>
-                    <a:pt x="1862185" y="28893"/>
-                  </a:lnTo>
-                  <a:lnTo>
-                    <a:pt x="1790563" y="27799"/>
-                  </a:lnTo>
-                  <a:lnTo>
-                    <a:pt x="1718940" y="26703"/>
-                  </a:lnTo>
-                  <a:lnTo>
-                    <a:pt x="1647318" y="25607"/>
-                  </a:lnTo>
-                  <a:lnTo>
-                    <a:pt x="1575695" y="24509"/>
-                  </a:lnTo>
-                  <a:lnTo>
-                    <a:pt x="1504073" y="23409"/>
-                  </a:lnTo>
-                  <a:lnTo>
-                    <a:pt x="1432450" y="22309"/>
-                  </a:lnTo>
-                  <a:lnTo>
-                    <a:pt x="1360827" y="21206"/>
-                  </a:lnTo>
-                  <a:lnTo>
-                    <a:pt x="1289205" y="20103"/>
-                  </a:lnTo>
-                  <a:lnTo>
-                    <a:pt x="1217582" y="18998"/>
-                  </a:lnTo>
-                  <a:lnTo>
-                    <a:pt x="1145960" y="17891"/>
-                  </a:lnTo>
-                  <a:lnTo>
-                    <a:pt x="1074337" y="16784"/>
-                  </a:lnTo>
-                  <a:lnTo>
-                    <a:pt x="1002715" y="15675"/>
-                  </a:lnTo>
-                  <a:lnTo>
-                    <a:pt x="931092" y="14564"/>
-                  </a:lnTo>
-                  <a:lnTo>
-                    <a:pt x="859470" y="13452"/>
-                  </a:lnTo>
-                  <a:lnTo>
-                    <a:pt x="787847" y="12339"/>
-                  </a:lnTo>
-                  <a:lnTo>
-                    <a:pt x="716225" y="11224"/>
-                  </a:lnTo>
-                  <a:lnTo>
-                    <a:pt x="644602" y="10108"/>
-                  </a:lnTo>
-                  <a:lnTo>
-                    <a:pt x="572980" y="8990"/>
-                  </a:lnTo>
-                  <a:lnTo>
-                    <a:pt x="501357" y="7871"/>
-                  </a:lnTo>
-                  <a:lnTo>
-                    <a:pt x="429735" y="6751"/>
-                  </a:lnTo>
-                  <a:lnTo>
-                    <a:pt x="358112" y="5629"/>
-                  </a:lnTo>
-                  <a:lnTo>
-                    <a:pt x="286490" y="4506"/>
-                  </a:lnTo>
-                  <a:lnTo>
-                    <a:pt x="214867" y="3382"/>
-                  </a:lnTo>
-                  <a:lnTo>
-                    <a:pt x="143245" y="2256"/>
-                  </a:lnTo>
-                  <a:lnTo>
-                    <a:pt x="71622" y="1128"/>
+                    <a:pt x="7019007" y="589712"/>
+                  </a:lnTo>
+                  <a:lnTo>
+                    <a:pt x="6947385" y="580487"/>
+                  </a:lnTo>
+                  <a:lnTo>
+                    <a:pt x="6875762" y="570999"/>
+                  </a:lnTo>
+                  <a:lnTo>
+                    <a:pt x="6804139" y="561242"/>
+                  </a:lnTo>
+                  <a:lnTo>
+                    <a:pt x="6732517" y="551206"/>
+                  </a:lnTo>
+                  <a:lnTo>
+                    <a:pt x="6660894" y="540886"/>
+                  </a:lnTo>
+                  <a:lnTo>
+                    <a:pt x="6589272" y="530271"/>
+                  </a:lnTo>
+                  <a:lnTo>
+                    <a:pt x="6517649" y="519355"/>
+                  </a:lnTo>
+                  <a:lnTo>
+                    <a:pt x="6446027" y="508128"/>
+                  </a:lnTo>
+                  <a:lnTo>
+                    <a:pt x="6374404" y="496582"/>
+                  </a:lnTo>
+                  <a:lnTo>
+                    <a:pt x="6302782" y="484707"/>
+                  </a:lnTo>
+                  <a:lnTo>
+                    <a:pt x="6231159" y="472494"/>
+                  </a:lnTo>
+                  <a:lnTo>
+                    <a:pt x="6159537" y="459934"/>
+                  </a:lnTo>
+                  <a:lnTo>
+                    <a:pt x="6087914" y="447017"/>
+                  </a:lnTo>
+                  <a:lnTo>
+                    <a:pt x="6016292" y="433732"/>
+                  </a:lnTo>
+                  <a:lnTo>
+                    <a:pt x="5944669" y="420070"/>
+                  </a:lnTo>
+                  <a:lnTo>
+                    <a:pt x="5873047" y="406018"/>
+                  </a:lnTo>
+                  <a:lnTo>
+                    <a:pt x="5801424" y="391567"/>
+                  </a:lnTo>
+                  <a:lnTo>
+                    <a:pt x="5729802" y="376705"/>
+                  </a:lnTo>
+                  <a:lnTo>
+                    <a:pt x="5658179" y="361420"/>
+                  </a:lnTo>
+                  <a:lnTo>
+                    <a:pt x="5586557" y="345701"/>
+                  </a:lnTo>
+                  <a:lnTo>
+                    <a:pt x="5514934" y="329534"/>
+                  </a:lnTo>
+                  <a:lnTo>
+                    <a:pt x="5443311" y="312907"/>
+                  </a:lnTo>
+                  <a:lnTo>
+                    <a:pt x="5371689" y="295807"/>
+                  </a:lnTo>
+                  <a:lnTo>
+                    <a:pt x="5300066" y="278220"/>
+                  </a:lnTo>
+                  <a:lnTo>
+                    <a:pt x="5228444" y="260134"/>
+                  </a:lnTo>
+                  <a:lnTo>
+                    <a:pt x="5156821" y="241533"/>
+                  </a:lnTo>
+                  <a:lnTo>
+                    <a:pt x="5085199" y="222402"/>
+                  </a:lnTo>
+                  <a:lnTo>
+                    <a:pt x="5013576" y="202728"/>
+                  </a:lnTo>
+                  <a:lnTo>
+                    <a:pt x="4941954" y="182494"/>
+                  </a:lnTo>
+                  <a:lnTo>
+                    <a:pt x="4870331" y="161684"/>
+                  </a:lnTo>
+                  <a:lnTo>
+                    <a:pt x="4798709" y="140282"/>
+                  </a:lnTo>
+                  <a:lnTo>
+                    <a:pt x="4727086" y="118271"/>
+                  </a:lnTo>
+                  <a:lnTo>
+                    <a:pt x="4655464" y="95634"/>
+                  </a:lnTo>
+                  <a:lnTo>
+                    <a:pt x="4583841" y="83890"/>
+                  </a:lnTo>
+                  <a:lnTo>
+                    <a:pt x="4512219" y="82641"/>
+                  </a:lnTo>
+                  <a:lnTo>
+                    <a:pt x="4440596" y="81389"/>
+                  </a:lnTo>
+                  <a:lnTo>
+                    <a:pt x="4368974" y="80136"/>
+                  </a:lnTo>
+                  <a:lnTo>
+                    <a:pt x="4297351" y="78881"/>
+                  </a:lnTo>
+                  <a:lnTo>
+                    <a:pt x="4225729" y="77623"/>
+                  </a:lnTo>
+                  <a:lnTo>
+                    <a:pt x="4154106" y="76364"/>
+                  </a:lnTo>
+                  <a:lnTo>
+                    <a:pt x="4082483" y="75103"/>
+                  </a:lnTo>
+                  <a:lnTo>
+                    <a:pt x="4010861" y="73840"/>
+                  </a:lnTo>
+                  <a:lnTo>
+                    <a:pt x="3939238" y="72576"/>
+                  </a:lnTo>
+                  <a:lnTo>
+                    <a:pt x="3867616" y="71309"/>
+                  </a:lnTo>
+                  <a:lnTo>
+                    <a:pt x="3795993" y="70040"/>
+                  </a:lnTo>
+                  <a:lnTo>
+                    <a:pt x="3724371" y="68770"/>
+                  </a:lnTo>
+                  <a:lnTo>
+                    <a:pt x="3652748" y="67497"/>
+                  </a:lnTo>
+                  <a:lnTo>
+                    <a:pt x="3581126" y="66223"/>
+                  </a:lnTo>
+                  <a:lnTo>
+                    <a:pt x="3509503" y="64947"/>
+                  </a:lnTo>
+                  <a:lnTo>
+                    <a:pt x="3437881" y="63669"/>
+                  </a:lnTo>
+                  <a:lnTo>
+                    <a:pt x="3366258" y="62389"/>
+                  </a:lnTo>
+                  <a:lnTo>
+                    <a:pt x="3294636" y="61107"/>
+                  </a:lnTo>
+                  <a:lnTo>
+                    <a:pt x="3223013" y="59823"/>
+                  </a:lnTo>
+                  <a:lnTo>
+                    <a:pt x="3151391" y="58537"/>
+                  </a:lnTo>
+                  <a:lnTo>
+                    <a:pt x="3079768" y="57249"/>
+                  </a:lnTo>
+                  <a:lnTo>
+                    <a:pt x="3008146" y="55959"/>
+                  </a:lnTo>
+                  <a:lnTo>
+                    <a:pt x="2936523" y="54667"/>
+                  </a:lnTo>
+                  <a:lnTo>
+                    <a:pt x="2864901" y="53374"/>
+                  </a:lnTo>
+                  <a:lnTo>
+                    <a:pt x="2793278" y="52078"/>
+                  </a:lnTo>
+                  <a:lnTo>
+                    <a:pt x="2721655" y="50781"/>
+                  </a:lnTo>
+                  <a:lnTo>
+                    <a:pt x="2650033" y="49481"/>
+                  </a:lnTo>
+                  <a:lnTo>
+                    <a:pt x="2578410" y="48180"/>
+                  </a:lnTo>
+                  <a:lnTo>
+                    <a:pt x="2506788" y="46876"/>
+                  </a:lnTo>
+                  <a:lnTo>
+                    <a:pt x="2435165" y="45571"/>
+                  </a:lnTo>
+                  <a:lnTo>
+                    <a:pt x="2363543" y="44264"/>
+                  </a:lnTo>
+                  <a:lnTo>
+                    <a:pt x="2291920" y="42954"/>
+                  </a:lnTo>
+                  <a:lnTo>
+                    <a:pt x="2220298" y="41643"/>
+                  </a:lnTo>
+                  <a:lnTo>
+                    <a:pt x="2148675" y="40330"/>
+                  </a:lnTo>
+                  <a:lnTo>
+                    <a:pt x="2077053" y="39015"/>
+                  </a:lnTo>
+                  <a:lnTo>
+                    <a:pt x="2005430" y="37697"/>
+                  </a:lnTo>
+                  <a:lnTo>
+                    <a:pt x="1933808" y="36378"/>
+                  </a:lnTo>
+                  <a:lnTo>
+                    <a:pt x="1862185" y="35057"/>
+                  </a:lnTo>
+                  <a:lnTo>
+                    <a:pt x="1790563" y="33734"/>
+                  </a:lnTo>
+                  <a:lnTo>
+                    <a:pt x="1718940" y="32409"/>
+                  </a:lnTo>
+                  <a:lnTo>
+                    <a:pt x="1647318" y="31082"/>
+                  </a:lnTo>
+                  <a:lnTo>
+                    <a:pt x="1575695" y="29752"/>
+                  </a:lnTo>
+                  <a:lnTo>
+                    <a:pt x="1504073" y="28421"/>
+                  </a:lnTo>
+                  <a:lnTo>
+                    <a:pt x="1432450" y="27088"/>
+                  </a:lnTo>
+                  <a:lnTo>
+                    <a:pt x="1360827" y="25753"/>
+                  </a:lnTo>
+                  <a:lnTo>
+                    <a:pt x="1289205" y="24416"/>
+                  </a:lnTo>
+                  <a:lnTo>
+                    <a:pt x="1217582" y="23077"/>
+                  </a:lnTo>
+                  <a:lnTo>
+                    <a:pt x="1145960" y="21735"/>
+                  </a:lnTo>
+                  <a:lnTo>
+                    <a:pt x="1074337" y="20392"/>
+                  </a:lnTo>
+                  <a:lnTo>
+                    <a:pt x="1002715" y="19047"/>
+                  </a:lnTo>
+                  <a:lnTo>
+                    <a:pt x="931092" y="17700"/>
+                  </a:lnTo>
+                  <a:lnTo>
+                    <a:pt x="859470" y="16350"/>
+                  </a:lnTo>
+                  <a:lnTo>
+                    <a:pt x="787847" y="14999"/>
+                  </a:lnTo>
+                  <a:lnTo>
+                    <a:pt x="716225" y="13646"/>
+                  </a:lnTo>
+                  <a:lnTo>
+                    <a:pt x="644602" y="12290"/>
+                  </a:lnTo>
+                  <a:lnTo>
+                    <a:pt x="572980" y="10933"/>
+                  </a:lnTo>
+                  <a:lnTo>
+                    <a:pt x="501357" y="9573"/>
+                  </a:lnTo>
+                  <a:lnTo>
+                    <a:pt x="429735" y="8212"/>
+                  </a:lnTo>
+                  <a:lnTo>
+                    <a:pt x="358112" y="6848"/>
+                  </a:lnTo>
+                  <a:lnTo>
+                    <a:pt x="286490" y="5483"/>
+                  </a:lnTo>
+                  <a:lnTo>
+                    <a:pt x="214867" y="4115"/>
+                  </a:lnTo>
+                  <a:lnTo>
+                    <a:pt x="143245" y="2745"/>
+                  </a:lnTo>
+                  <a:lnTo>
+                    <a:pt x="71622" y="1373"/>
                   </a:lnTo>
                   <a:lnTo>
                     <a:pt x="0" y="0"/>
@@ -4119,312 +4119,312 @@
           </p:nvSpPr>
           <p:spPr>
             <a:xfrm>
-              <a:off x="1172049" y="3426136"/>
-              <a:ext cx="7090630" cy="1631633"/>
+              <a:off x="1172049" y="3405102"/>
+              <a:ext cx="7090630" cy="1653823"/>
             </a:xfrm>
             <a:custGeom>
               <a:avLst/>
               <a:pathLst>
-                <a:path w="7090630" h="1631633">
+                <a:path w="7090630" h="1653823">
                   <a:moveTo>
                     <a:pt x="0" y="0"/>
                   </a:moveTo>
                   <a:lnTo>
-                    <a:pt x="71622" y="31003"/>
-                  </a:lnTo>
-                  <a:lnTo>
-                    <a:pt x="143245" y="61555"/>
-                  </a:lnTo>
-                  <a:lnTo>
-                    <a:pt x="214867" y="91663"/>
-                  </a:lnTo>
-                  <a:lnTo>
-                    <a:pt x="286490" y="121333"/>
-                  </a:lnTo>
-                  <a:lnTo>
-                    <a:pt x="358112" y="150572"/>
-                  </a:lnTo>
-                  <a:lnTo>
-                    <a:pt x="429735" y="179385"/>
-                  </a:lnTo>
-                  <a:lnTo>
-                    <a:pt x="501357" y="207778"/>
-                  </a:lnTo>
-                  <a:lnTo>
-                    <a:pt x="572980" y="235759"/>
-                  </a:lnTo>
-                  <a:lnTo>
-                    <a:pt x="644602" y="263333"/>
-                  </a:lnTo>
-                  <a:lnTo>
-                    <a:pt x="716225" y="290505"/>
-                  </a:lnTo>
-                  <a:lnTo>
-                    <a:pt x="787847" y="317282"/>
-                  </a:lnTo>
-                  <a:lnTo>
-                    <a:pt x="859470" y="343670"/>
-                  </a:lnTo>
-                  <a:lnTo>
-                    <a:pt x="931092" y="369674"/>
-                  </a:lnTo>
-                  <a:lnTo>
-                    <a:pt x="1002715" y="395299"/>
-                  </a:lnTo>
-                  <a:lnTo>
-                    <a:pt x="1074337" y="420552"/>
-                  </a:lnTo>
-                  <a:lnTo>
-                    <a:pt x="1145960" y="445437"/>
-                  </a:lnTo>
-                  <a:lnTo>
-                    <a:pt x="1217582" y="469960"/>
-                  </a:lnTo>
-                  <a:lnTo>
-                    <a:pt x="1289205" y="494127"/>
-                  </a:lnTo>
-                  <a:lnTo>
-                    <a:pt x="1360827" y="517942"/>
-                  </a:lnTo>
-                  <a:lnTo>
-                    <a:pt x="1432450" y="541410"/>
-                  </a:lnTo>
-                  <a:lnTo>
-                    <a:pt x="1504073" y="564537"/>
-                  </a:lnTo>
-                  <a:lnTo>
-                    <a:pt x="1575695" y="587328"/>
-                  </a:lnTo>
-                  <a:lnTo>
-                    <a:pt x="1647318" y="609787"/>
-                  </a:lnTo>
-                  <a:lnTo>
-                    <a:pt x="1718940" y="631919"/>
-                  </a:lnTo>
-                  <a:lnTo>
-                    <a:pt x="1790563" y="653729"/>
-                  </a:lnTo>
-                  <a:lnTo>
-                    <a:pt x="1862185" y="675222"/>
-                  </a:lnTo>
-                  <a:lnTo>
-                    <a:pt x="1933808" y="696403"/>
-                  </a:lnTo>
-                  <a:lnTo>
-                    <a:pt x="2005430" y="717275"/>
-                  </a:lnTo>
-                  <a:lnTo>
-                    <a:pt x="2077053" y="737843"/>
-                  </a:lnTo>
-                  <a:lnTo>
-                    <a:pt x="2148675" y="758113"/>
-                  </a:lnTo>
-                  <a:lnTo>
-                    <a:pt x="2220298" y="778087"/>
-                  </a:lnTo>
-                  <a:lnTo>
-                    <a:pt x="2291920" y="797771"/>
-                  </a:lnTo>
-                  <a:lnTo>
-                    <a:pt x="2363543" y="817168"/>
-                  </a:lnTo>
-                  <a:lnTo>
-                    <a:pt x="2435165" y="836284"/>
-                  </a:lnTo>
-                  <a:lnTo>
-                    <a:pt x="2506788" y="855121"/>
-                  </a:lnTo>
-                  <a:lnTo>
-                    <a:pt x="2578410" y="873684"/>
-                  </a:lnTo>
-                  <a:lnTo>
-                    <a:pt x="2650033" y="891977"/>
-                  </a:lnTo>
-                  <a:lnTo>
-                    <a:pt x="2721655" y="910004"/>
-                  </a:lnTo>
-                  <a:lnTo>
-                    <a:pt x="2793278" y="927769"/>
-                  </a:lnTo>
-                  <a:lnTo>
-                    <a:pt x="2864901" y="945275"/>
-                  </a:lnTo>
-                  <a:lnTo>
-                    <a:pt x="2936523" y="962527"/>
-                  </a:lnTo>
-                  <a:lnTo>
-                    <a:pt x="3008146" y="979527"/>
-                  </a:lnTo>
-                  <a:lnTo>
-                    <a:pt x="3079768" y="996281"/>
-                  </a:lnTo>
-                  <a:lnTo>
-                    <a:pt x="3151391" y="1012790"/>
-                  </a:lnTo>
-                  <a:lnTo>
-                    <a:pt x="3223013" y="1029059"/>
-                  </a:lnTo>
-                  <a:lnTo>
-                    <a:pt x="3294636" y="1045092"/>
-                  </a:lnTo>
-                  <a:lnTo>
-                    <a:pt x="3366258" y="1060892"/>
-                  </a:lnTo>
-                  <a:lnTo>
-                    <a:pt x="3437881" y="1076461"/>
-                  </a:lnTo>
-                  <a:lnTo>
-                    <a:pt x="3509503" y="1091804"/>
-                  </a:lnTo>
-                  <a:lnTo>
-                    <a:pt x="3581126" y="1106924"/>
-                  </a:lnTo>
-                  <a:lnTo>
-                    <a:pt x="3652748" y="1121824"/>
-                  </a:lnTo>
-                  <a:lnTo>
-                    <a:pt x="3724371" y="1136507"/>
-                  </a:lnTo>
-                  <a:lnTo>
-                    <a:pt x="3795993" y="1150977"/>
-                  </a:lnTo>
-                  <a:lnTo>
-                    <a:pt x="3867616" y="1165236"/>
-                  </a:lnTo>
-                  <a:lnTo>
-                    <a:pt x="3939238" y="1179287"/>
-                  </a:lnTo>
-                  <a:lnTo>
-                    <a:pt x="4010861" y="1193135"/>
-                  </a:lnTo>
-                  <a:lnTo>
-                    <a:pt x="4082483" y="1206780"/>
-                  </a:lnTo>
-                  <a:lnTo>
-                    <a:pt x="4154106" y="1220227"/>
-                  </a:lnTo>
-                  <a:lnTo>
-                    <a:pt x="4225729" y="1233479"/>
-                  </a:lnTo>
-                  <a:lnTo>
-                    <a:pt x="4297351" y="1246538"/>
-                  </a:lnTo>
-                  <a:lnTo>
-                    <a:pt x="4368974" y="1259407"/>
-                  </a:lnTo>
-                  <a:lnTo>
-                    <a:pt x="4440596" y="1272088"/>
-                  </a:lnTo>
-                  <a:lnTo>
-                    <a:pt x="4512219" y="1284585"/>
-                  </a:lnTo>
-                  <a:lnTo>
-                    <a:pt x="4583841" y="1296901"/>
-                  </a:lnTo>
-                  <a:lnTo>
-                    <a:pt x="4655464" y="1309037"/>
-                  </a:lnTo>
-                  <a:lnTo>
-                    <a:pt x="4727086" y="1320996"/>
-                  </a:lnTo>
-                  <a:lnTo>
-                    <a:pt x="4798709" y="1332782"/>
-                  </a:lnTo>
-                  <a:lnTo>
-                    <a:pt x="4870331" y="1344396"/>
-                  </a:lnTo>
-                  <a:lnTo>
-                    <a:pt x="4941954" y="1355841"/>
-                  </a:lnTo>
-                  <a:lnTo>
-                    <a:pt x="5013576" y="1367120"/>
-                  </a:lnTo>
-                  <a:lnTo>
-                    <a:pt x="5085199" y="1378234"/>
-                  </a:lnTo>
-                  <a:lnTo>
-                    <a:pt x="5156821" y="1389187"/>
-                  </a:lnTo>
-                  <a:lnTo>
-                    <a:pt x="5228444" y="1399981"/>
-                  </a:lnTo>
-                  <a:lnTo>
-                    <a:pt x="5300066" y="1410617"/>
-                  </a:lnTo>
-                  <a:lnTo>
-                    <a:pt x="5371689" y="1421099"/>
-                  </a:lnTo>
-                  <a:lnTo>
-                    <a:pt x="5443311" y="1431428"/>
-                  </a:lnTo>
-                  <a:lnTo>
-                    <a:pt x="5514934" y="1441607"/>
-                  </a:lnTo>
-                  <a:lnTo>
-                    <a:pt x="5586557" y="1451638"/>
-                  </a:lnTo>
-                  <a:lnTo>
-                    <a:pt x="5658179" y="1461523"/>
-                  </a:lnTo>
-                  <a:lnTo>
-                    <a:pt x="5729802" y="1471265"/>
-                  </a:lnTo>
-                  <a:lnTo>
-                    <a:pt x="5801424" y="1480864"/>
-                  </a:lnTo>
-                  <a:lnTo>
-                    <a:pt x="5873047" y="1490324"/>
-                  </a:lnTo>
-                  <a:lnTo>
-                    <a:pt x="5944669" y="1499646"/>
-                  </a:lnTo>
-                  <a:lnTo>
-                    <a:pt x="6016292" y="1508833"/>
-                  </a:lnTo>
-                  <a:lnTo>
-                    <a:pt x="6087914" y="1517886"/>
-                  </a:lnTo>
-                  <a:lnTo>
-                    <a:pt x="6159537" y="1526807"/>
-                  </a:lnTo>
-                  <a:lnTo>
-                    <a:pt x="6231159" y="1535598"/>
-                  </a:lnTo>
-                  <a:lnTo>
-                    <a:pt x="6302782" y="1544262"/>
-                  </a:lnTo>
-                  <a:lnTo>
-                    <a:pt x="6374404" y="1552799"/>
-                  </a:lnTo>
-                  <a:lnTo>
-                    <a:pt x="6446027" y="1561213"/>
-                  </a:lnTo>
-                  <a:lnTo>
-                    <a:pt x="6517649" y="1569504"/>
-                  </a:lnTo>
-                  <a:lnTo>
-                    <a:pt x="6589272" y="1577674"/>
-                  </a:lnTo>
-                  <a:lnTo>
-                    <a:pt x="6660894" y="1585725"/>
-                  </a:lnTo>
-                  <a:lnTo>
-                    <a:pt x="6732517" y="1593660"/>
-                  </a:lnTo>
-                  <a:lnTo>
-                    <a:pt x="6804139" y="1601479"/>
-                  </a:lnTo>
-                  <a:lnTo>
-                    <a:pt x="6875762" y="1609184"/>
-                  </a:lnTo>
-                  <a:lnTo>
-                    <a:pt x="6947385" y="1616777"/>
-                  </a:lnTo>
-                  <a:lnTo>
-                    <a:pt x="7019007" y="1624259"/>
-                  </a:lnTo>
-                  <a:lnTo>
-                    <a:pt x="7090630" y="1631633"/>
+                    <a:pt x="71622" y="31569"/>
+                  </a:lnTo>
+                  <a:lnTo>
+                    <a:pt x="143245" y="62675"/>
+                  </a:lnTo>
+                  <a:lnTo>
+                    <a:pt x="214867" y="93325"/>
+                  </a:lnTo>
+                  <a:lnTo>
+                    <a:pt x="286490" y="123526"/>
+                  </a:lnTo>
+                  <a:lnTo>
+                    <a:pt x="358112" y="153283"/>
+                  </a:lnTo>
+                  <a:lnTo>
+                    <a:pt x="429735" y="182604"/>
+                  </a:lnTo>
+                  <a:lnTo>
+                    <a:pt x="501357" y="211495"/>
+                  </a:lnTo>
+                  <a:lnTo>
+                    <a:pt x="572980" y="239962"/>
+                  </a:lnTo>
+                  <a:lnTo>
+                    <a:pt x="644602" y="268012"/>
+                  </a:lnTo>
+                  <a:lnTo>
+                    <a:pt x="716225" y="295650"/>
+                  </a:lnTo>
+                  <a:lnTo>
+                    <a:pt x="787847" y="322883"/>
+                  </a:lnTo>
+                  <a:lnTo>
+                    <a:pt x="859470" y="349716"/>
+                  </a:lnTo>
+                  <a:lnTo>
+                    <a:pt x="931092" y="376155"/>
+                  </a:lnTo>
+                  <a:lnTo>
+                    <a:pt x="1002715" y="402207"/>
+                  </a:lnTo>
+                  <a:lnTo>
+                    <a:pt x="1074337" y="427877"/>
+                  </a:lnTo>
+                  <a:lnTo>
+                    <a:pt x="1145960" y="453170"/>
+                  </a:lnTo>
+                  <a:lnTo>
+                    <a:pt x="1217582" y="478092"/>
+                  </a:lnTo>
+                  <a:lnTo>
+                    <a:pt x="1289205" y="502648"/>
+                  </a:lnTo>
+                  <a:lnTo>
+                    <a:pt x="1360827" y="526844"/>
+                  </a:lnTo>
+                  <a:lnTo>
+                    <a:pt x="1432450" y="550686"/>
+                  </a:lnTo>
+                  <a:lnTo>
+                    <a:pt x="1504073" y="574177"/>
+                  </a:lnTo>
+                  <a:lnTo>
+                    <a:pt x="1575695" y="597324"/>
+                  </a:lnTo>
+                  <a:lnTo>
+                    <a:pt x="1647318" y="620132"/>
+                  </a:lnTo>
+                  <a:lnTo>
+                    <a:pt x="1718940" y="642604"/>
+                  </a:lnTo>
+                  <a:lnTo>
+                    <a:pt x="1790563" y="664748"/>
+                  </a:lnTo>
+                  <a:lnTo>
+                    <a:pt x="1862185" y="686566"/>
+                  </a:lnTo>
+                  <a:lnTo>
+                    <a:pt x="1933808" y="708064"/>
+                  </a:lnTo>
+                  <a:lnTo>
+                    <a:pt x="2005430" y="729247"/>
+                  </a:lnTo>
+                  <a:lnTo>
+                    <a:pt x="2077053" y="750120"/>
+                  </a:lnTo>
+                  <a:lnTo>
+                    <a:pt x="2148675" y="770686"/>
+                  </a:lnTo>
+                  <a:lnTo>
+                    <a:pt x="2220298" y="790950"/>
+                  </a:lnTo>
+                  <a:lnTo>
+                    <a:pt x="2291920" y="810917"/>
+                  </a:lnTo>
+                  <a:lnTo>
+                    <a:pt x="2363543" y="830592"/>
+                  </a:lnTo>
+                  <a:lnTo>
+                    <a:pt x="2435165" y="849977"/>
+                  </a:lnTo>
+                  <a:lnTo>
+                    <a:pt x="2506788" y="869079"/>
+                  </a:lnTo>
+                  <a:lnTo>
+                    <a:pt x="2578410" y="887900"/>
+                  </a:lnTo>
+                  <a:lnTo>
+                    <a:pt x="2650033" y="906445"/>
+                  </a:lnTo>
+                  <a:lnTo>
+                    <a:pt x="2721655" y="924718"/>
+                  </a:lnTo>
+                  <a:lnTo>
+                    <a:pt x="2793278" y="942723"/>
+                  </a:lnTo>
+                  <a:lnTo>
+                    <a:pt x="2864901" y="960463"/>
+                  </a:lnTo>
+                  <a:lnTo>
+                    <a:pt x="2936523" y="977944"/>
+                  </a:lnTo>
+                  <a:lnTo>
+                    <a:pt x="3008146" y="995168"/>
+                  </a:lnTo>
+                  <a:lnTo>
+                    <a:pt x="3079768" y="1012140"/>
+                  </a:lnTo>
+                  <a:lnTo>
+                    <a:pt x="3151391" y="1028862"/>
+                  </a:lnTo>
+                  <a:lnTo>
+                    <a:pt x="3223013" y="1045340"/>
+                  </a:lnTo>
+                  <a:lnTo>
+                    <a:pt x="3294636" y="1061575"/>
+                  </a:lnTo>
+                  <a:lnTo>
+                    <a:pt x="3366258" y="1077573"/>
+                  </a:lnTo>
+                  <a:lnTo>
+                    <a:pt x="3437881" y="1093335"/>
+                  </a:lnTo>
+                  <a:lnTo>
+                    <a:pt x="3509503" y="1108867"/>
+                  </a:lnTo>
+                  <a:lnTo>
+                    <a:pt x="3581126" y="1124171"/>
+                  </a:lnTo>
+                  <a:lnTo>
+                    <a:pt x="3652748" y="1139250"/>
+                  </a:lnTo>
+                  <a:lnTo>
+                    <a:pt x="3724371" y="1154108"/>
+                  </a:lnTo>
+                  <a:lnTo>
+                    <a:pt x="3795993" y="1168748"/>
+                  </a:lnTo>
+                  <a:lnTo>
+                    <a:pt x="3867616" y="1183173"/>
+                  </a:lnTo>
+                  <a:lnTo>
+                    <a:pt x="3939238" y="1197387"/>
+                  </a:lnTo>
+                  <a:lnTo>
+                    <a:pt x="4010861" y="1211392"/>
+                  </a:lnTo>
+                  <a:lnTo>
+                    <a:pt x="4082483" y="1225192"/>
+                  </a:lnTo>
+                  <a:lnTo>
+                    <a:pt x="4154106" y="1238789"/>
+                  </a:lnTo>
+                  <a:lnTo>
+                    <a:pt x="4225729" y="1252187"/>
+                  </a:lnTo>
+                  <a:lnTo>
+                    <a:pt x="4297351" y="1265388"/>
+                  </a:lnTo>
+                  <a:lnTo>
+                    <a:pt x="4368974" y="1278396"/>
+                  </a:lnTo>
+                  <a:lnTo>
+                    <a:pt x="4440596" y="1291213"/>
+                  </a:lnTo>
+                  <a:lnTo>
+                    <a:pt x="4512219" y="1303842"/>
+                  </a:lnTo>
+                  <a:lnTo>
+                    <a:pt x="4583841" y="1316286"/>
+                  </a:lnTo>
+                  <a:lnTo>
+                    <a:pt x="4655464" y="1328547"/>
+                  </a:lnTo>
+                  <a:lnTo>
+                    <a:pt x="4727086" y="1340628"/>
+                  </a:lnTo>
+                  <a:lnTo>
+                    <a:pt x="4798709" y="1352532"/>
+                  </a:lnTo>
+                  <a:lnTo>
+                    <a:pt x="4870331" y="1364261"/>
+                  </a:lnTo>
+                  <a:lnTo>
+                    <a:pt x="4941954" y="1375819"/>
+                  </a:lnTo>
+                  <a:lnTo>
+                    <a:pt x="5013576" y="1387207"/>
+                  </a:lnTo>
+                  <a:lnTo>
+                    <a:pt x="5085199" y="1398427"/>
+                  </a:lnTo>
+                  <a:lnTo>
+                    <a:pt x="5156821" y="1409483"/>
+                  </a:lnTo>
+                  <a:lnTo>
+                    <a:pt x="5228444" y="1420377"/>
+                  </a:lnTo>
+                  <a:lnTo>
+                    <a:pt x="5300066" y="1431112"/>
+                  </a:lnTo>
+                  <a:lnTo>
+                    <a:pt x="5371689" y="1441688"/>
+                  </a:lnTo>
+                  <a:lnTo>
+                    <a:pt x="5443311" y="1452110"/>
+                  </a:lnTo>
+                  <a:lnTo>
+                    <a:pt x="5514934" y="1462379"/>
+                  </a:lnTo>
+                  <a:lnTo>
+                    <a:pt x="5586557" y="1472497"/>
+                  </a:lnTo>
+                  <a:lnTo>
+                    <a:pt x="5658179" y="1482466"/>
+                  </a:lnTo>
+                  <a:lnTo>
+                    <a:pt x="5729802" y="1492290"/>
+                  </a:lnTo>
+                  <a:lnTo>
+                    <a:pt x="5801424" y="1501969"/>
+                  </a:lnTo>
+                  <a:lnTo>
+                    <a:pt x="5873047" y="1511507"/>
+                  </a:lnTo>
+                  <a:lnTo>
+                    <a:pt x="5944669" y="1520904"/>
+                  </a:lnTo>
+                  <a:lnTo>
+                    <a:pt x="6016292" y="1530164"/>
+                  </a:lnTo>
+                  <a:lnTo>
+                    <a:pt x="6087914" y="1539287"/>
+                  </a:lnTo>
+                  <a:lnTo>
+                    <a:pt x="6159537" y="1548277"/>
+                  </a:lnTo>
+                  <a:lnTo>
+                    <a:pt x="6231159" y="1557135"/>
+                  </a:lnTo>
+                  <a:lnTo>
+                    <a:pt x="6302782" y="1565863"/>
+                  </a:lnTo>
+                  <a:lnTo>
+                    <a:pt x="6374404" y="1574464"/>
+                  </a:lnTo>
+                  <a:lnTo>
+                    <a:pt x="6446027" y="1582938"/>
+                  </a:lnTo>
+                  <a:lnTo>
+                    <a:pt x="6517649" y="1591287"/>
+                  </a:lnTo>
+                  <a:lnTo>
+                    <a:pt x="6589272" y="1599514"/>
+                  </a:lnTo>
+                  <a:lnTo>
+                    <a:pt x="6660894" y="1607621"/>
+                  </a:lnTo>
+                  <a:lnTo>
+                    <a:pt x="6732517" y="1615608"/>
+                  </a:lnTo>
+                  <a:lnTo>
+                    <a:pt x="6804139" y="1623479"/>
+                  </a:lnTo>
+                  <a:lnTo>
+                    <a:pt x="6875762" y="1631234"/>
+                  </a:lnTo>
+                  <a:lnTo>
+                    <a:pt x="6947385" y="1638875"/>
+                  </a:lnTo>
+                  <a:lnTo>
+                    <a:pt x="7019007" y="1646404"/>
+                  </a:lnTo>
+                  <a:lnTo>
+                    <a:pt x="7090630" y="1653823"/>
                   </a:lnTo>
                 </a:path>
               </a:pathLst>
@@ -4496,7 +4496,7 @@
           </p:nvSpPr>
           <p:spPr>
             <a:xfrm>
-              <a:off x="5783789" y="2073503"/>
+              <a:off x="5793129" y="2073503"/>
               <a:ext cx="0" cy="3649639"/>
             </a:xfrm>
             <a:custGeom>
@@ -4539,7 +4539,7 @@
           </p:nvSpPr>
           <p:spPr>
             <a:xfrm>
-              <a:off x="4658599" y="2073503"/>
+              <a:off x="4667548" y="2073503"/>
               <a:ext cx="0" cy="3649639"/>
             </a:xfrm>
             <a:custGeom>
@@ -4582,7 +4582,7 @@
           </p:nvSpPr>
           <p:spPr>
             <a:xfrm>
-              <a:off x="6864197" y="2073503"/>
+              <a:off x="6868063" y="2073503"/>
               <a:ext cx="0" cy="3649639"/>
             </a:xfrm>
             <a:custGeom>
@@ -4855,7 +4855,7 @@
           </p:nvSpPr>
           <p:spPr>
             <a:xfrm>
-              <a:off x="3120823" y="5785772"/>
+              <a:off x="3120990" y="5785772"/>
               <a:ext cx="161574" cy="80101"/>
             </a:xfrm>
             <a:prstGeom prst="rect">
@@ -4901,7 +4901,7 @@
           </p:nvSpPr>
           <p:spPr>
             <a:xfrm>
-              <a:off x="5688698" y="5785772"/>
+              <a:off x="5688107" y="5785772"/>
               <a:ext cx="62179" cy="80101"/>
             </a:xfrm>
             <a:prstGeom prst="rect">
@@ -4947,7 +4947,7 @@
           </p:nvSpPr>
           <p:spPr>
             <a:xfrm>
-              <a:off x="8175787" y="5785772"/>
+              <a:off x="8174437" y="5785772"/>
               <a:ext cx="124358" cy="80101"/>
             </a:xfrm>
             <a:prstGeom prst="rect">
@@ -5118,7 +5118,7 @@
                   <a:latin typeface="Helvetica"/>
                   <a:cs typeface="Helvetica"/>
                 </a:rPr>
-                <a:t>subHR per 10 mL/min decline: 1.23 (1.02-1.48), p_Bonf = 0.192 (n = 6)  |  per IQR decline (Δ = 21.9): 1.57 (1.04-2.37)  |  IQR: [-10.5, 11.4]</a:t>
+                <a:t>subHR per 10 mL/min decline: 1.23 (1.02-1.48), p_Bonf = 0.175 (n = 6)  |  per IQR decline (Δ = 21.9): 1.57 (1.05-2.37)  |  IQR: [-10.4, 11.4]</a:t>
               </a:r>
             </a:p>
           </p:txBody>
